--- a/Nirman/Avdhut Poster.pptx
+++ b/Nirman/Avdhut Poster.pptx
@@ -10,8 +10,8 @@
   <p:sldIdLst>
     <p:sldId id="256" r:id="rId2"/>
   </p:sldIdLst>
-  <p:sldSz cx="10688638" cy="15124113"/>
-  <p:notesSz cx="15124113" cy="10688638"/>
+  <p:sldSz cx="6858000" cy="9906000" type="A4"/>
+  <p:notesSz cx="10688638" cy="15124113"/>
   <p:defaultTextStyle>
     <a:defPPr marR="0" lvl="0" algn="l" rtl="0">
       <a:lnSpc>
@@ -38,7 +38,7 @@
         <a:srgbClr val="000000"/>
       </a:buClr>
       <a:buFont typeface="Arial"/>
-      <a:defRPr sz="1400" b="0" i="0" u="none" strike="noStrike" cap="none" spc="0">
+      <a:defRPr sz="909" b="0" i="0" u="none" strike="noStrike" cap="none" spc="0">
         <a:solidFill>
           <a:srgbClr val="000000"/>
         </a:solidFill>
@@ -62,7 +62,7 @@
         <a:srgbClr val="000000"/>
       </a:buClr>
       <a:buFont typeface="Arial"/>
-      <a:defRPr sz="1400" b="0" i="0" u="none" strike="noStrike" cap="none" spc="0">
+      <a:defRPr sz="909" b="0" i="0" u="none" strike="noStrike" cap="none" spc="0">
         <a:solidFill>
           <a:srgbClr val="000000"/>
         </a:solidFill>
@@ -86,7 +86,7 @@
         <a:srgbClr val="000000"/>
       </a:buClr>
       <a:buFont typeface="Arial"/>
-      <a:defRPr sz="1400" b="0" i="0" u="none" strike="noStrike" cap="none" spc="0">
+      <a:defRPr sz="909" b="0" i="0" u="none" strike="noStrike" cap="none" spc="0">
         <a:solidFill>
           <a:srgbClr val="000000"/>
         </a:solidFill>
@@ -110,7 +110,7 @@
         <a:srgbClr val="000000"/>
       </a:buClr>
       <a:buFont typeface="Arial"/>
-      <a:defRPr sz="1400" b="0" i="0" u="none" strike="noStrike" cap="none" spc="0">
+      <a:defRPr sz="909" b="0" i="0" u="none" strike="noStrike" cap="none" spc="0">
         <a:solidFill>
           <a:srgbClr val="000000"/>
         </a:solidFill>
@@ -134,7 +134,7 @@
         <a:srgbClr val="000000"/>
       </a:buClr>
       <a:buFont typeface="Arial"/>
-      <a:defRPr sz="1400" b="0" i="0" u="none" strike="noStrike" cap="none" spc="0">
+      <a:defRPr sz="909" b="0" i="0" u="none" strike="noStrike" cap="none" spc="0">
         <a:solidFill>
           <a:srgbClr val="000000"/>
         </a:solidFill>
@@ -158,7 +158,7 @@
         <a:srgbClr val="000000"/>
       </a:buClr>
       <a:buFont typeface="Arial"/>
-      <a:defRPr sz="1400" b="0" i="0" u="none" strike="noStrike" cap="none" spc="0">
+      <a:defRPr sz="909" b="0" i="0" u="none" strike="noStrike" cap="none" spc="0">
         <a:solidFill>
           <a:srgbClr val="000000"/>
         </a:solidFill>
@@ -182,7 +182,7 @@
         <a:srgbClr val="000000"/>
       </a:buClr>
       <a:buFont typeface="Arial"/>
-      <a:defRPr sz="1400" b="0" i="0" u="none" strike="noStrike" cap="none" spc="0">
+      <a:defRPr sz="909" b="0" i="0" u="none" strike="noStrike" cap="none" spc="0">
         <a:solidFill>
           <a:srgbClr val="000000"/>
         </a:solidFill>
@@ -206,7 +206,7 @@
         <a:srgbClr val="000000"/>
       </a:buClr>
       <a:buFont typeface="Arial"/>
-      <a:defRPr sz="1400" b="0" i="0" u="none" strike="noStrike" cap="none" spc="0">
+      <a:defRPr sz="909" b="0" i="0" u="none" strike="noStrike" cap="none" spc="0">
         <a:solidFill>
           <a:srgbClr val="000000"/>
         </a:solidFill>
@@ -230,7 +230,7 @@
         <a:srgbClr val="000000"/>
       </a:buClr>
       <a:buFont typeface="Arial"/>
-      <a:defRPr sz="1400" b="0" i="0" u="none" strike="noStrike" cap="none" spc="0">
+      <a:defRPr sz="909" b="0" i="0" u="none" strike="noStrike" cap="none" spc="0">
         <a:solidFill>
           <a:srgbClr val="000000"/>
         </a:solidFill>
@@ -246,7 +246,7 @@
       <p15:sldGuideLst xmlns:p15="http://schemas.microsoft.com/office/powerpoint/2012/main"/>
     </p:ext>
     <p:ext uri="GoogleSlidesCustomDataVersion2">
-      <go:slidesCustomData xmlns="" xmlns:mc="http://schemas.openxmlformats.org/markup-compatibility/2006" xmlns:mv="urn:schemas-microsoft-com:mac:vml" xmlns:c="http://schemas.openxmlformats.org/drawingml/2006/chart" xmlns:dgm="http://schemas.openxmlformats.org/drawingml/2006/diagram" xmlns:o="urn:schemas-microsoft-com:office:office" xmlns:v="urn:schemas-microsoft-com:vml" xmlns:pvml="urn:schemas-microsoft-com:office:powerpoint" xmlns:com="http://schemas.openxmlformats.org/drawingml/2006/compatibility" xmlns:p14="http://schemas.microsoft.com/office/powerpoint/2010/main" xmlns:p15="http://schemas.microsoft.com/office/powerpoint/2012/main" xmlns:ahyp="http://schemas.microsoft.com/office/drawing/2018/hyperlinkcolor" xmlns:go="http://customooxmlschemas.google.com/" r:id="rId6" roundtripDataSignature="AMtx7mioK8NBJgx99EHxAZpjcB/LAPDS7A=="/>
+      <go:slidesCustomData xmlns:go="http://customooxmlschemas.google.com/" xmlns:ahyp="http://schemas.microsoft.com/office/drawing/2018/hyperlinkcolor" xmlns:p15="http://schemas.microsoft.com/office/powerpoint/2012/main" xmlns:p14="http://schemas.microsoft.com/office/powerpoint/2010/main" xmlns:com="http://schemas.openxmlformats.org/drawingml/2006/compatibility" xmlns:pvml="urn:schemas-microsoft-com:office:powerpoint" xmlns:v="urn:schemas-microsoft-com:vml" xmlns:o="urn:schemas-microsoft-com:office:office" xmlns:dgm="http://schemas.openxmlformats.org/drawingml/2006/diagram" xmlns:c="http://schemas.openxmlformats.org/drawingml/2006/chart" xmlns:mv="urn:schemas-microsoft-com:mac:vml" xmlns:mc="http://schemas.openxmlformats.org/markup-compatibility/2006" xmlns="" r:id="rId6" roundtripDataSignature="AMtx7mioK8NBJgx99EHxAZpjcB/LAPDS7A=="/>
     </p:ext>
   </p:extLst>
 </p:presentation>
@@ -290,7 +290,7 @@
         <p:spPr>
           <a:xfrm>
             <a:off x="0" y="0"/>
-            <a:ext cx="2971800" cy="458788"/>
+            <a:ext cx="2100255" cy="649172"/>
           </a:xfrm>
           <a:prstGeom prst="rect">
             <a:avLst/>
@@ -494,8 +494,8 @@
         </p:nvSpPr>
         <p:spPr>
           <a:xfrm>
-            <a:off x="3884613" y="0"/>
-            <a:ext cx="2971800" cy="458788"/>
+            <a:off x="2745366" y="0"/>
+            <a:ext cx="2100255" cy="649172"/>
           </a:xfrm>
           <a:prstGeom prst="rect">
             <a:avLst/>
@@ -699,8 +699,8 @@
         </p:nvSpPr>
         <p:spPr>
           <a:xfrm>
-            <a:off x="685800" y="1143000"/>
-            <a:ext cx="5486400" cy="3086100"/>
+            <a:off x="912813" y="1617663"/>
+            <a:ext cx="3021012" cy="4365625"/>
           </a:xfrm>
           <a:custGeom>
             <a:avLst/>
@@ -750,8 +750,8 @@
         </p:nvSpPr>
         <p:spPr>
           <a:xfrm>
-            <a:off x="685800" y="4400550"/>
-            <a:ext cx="5486400" cy="3600450"/>
+            <a:off x="484674" y="6226651"/>
+            <a:ext cx="3877394" cy="5094532"/>
           </a:xfrm>
           <a:prstGeom prst="rect">
             <a:avLst/>
@@ -955,8 +955,8 @@
         </p:nvSpPr>
         <p:spPr>
           <a:xfrm>
-            <a:off x="0" y="8685213"/>
-            <a:ext cx="2971800" cy="458787"/>
+            <a:off x="0" y="12289326"/>
+            <a:ext cx="2100255" cy="649170"/>
           </a:xfrm>
           <a:prstGeom prst="rect">
             <a:avLst/>
@@ -1160,8 +1160,8 @@
         </p:nvSpPr>
         <p:spPr>
           <a:xfrm>
-            <a:off x="3884613" y="8685213"/>
-            <a:ext cx="2971800" cy="458787"/>
+            <a:off x="2745366" y="12289326"/>
+            <a:ext cx="2100255" cy="649170"/>
           </a:xfrm>
           <a:prstGeom prst="rect">
             <a:avLst/>
@@ -1239,7 +1239,7 @@
         <a:srgbClr val="000000"/>
       </a:buClr>
       <a:buFont typeface="Arial"/>
-      <a:defRPr sz="1400" b="0" i="0" u="none" strike="noStrike" cap="none" spc="0">
+      <a:defRPr sz="909" b="0" i="0" u="none" strike="noStrike" cap="none" spc="0">
         <a:solidFill>
           <a:srgbClr val="000000"/>
         </a:solidFill>
@@ -1263,7 +1263,7 @@
         <a:srgbClr val="000000"/>
       </a:buClr>
       <a:buFont typeface="Arial"/>
-      <a:defRPr sz="1400" b="0" i="0" u="none" strike="noStrike" cap="none" spc="0">
+      <a:defRPr sz="909" b="0" i="0" u="none" strike="noStrike" cap="none" spc="0">
         <a:solidFill>
           <a:srgbClr val="000000"/>
         </a:solidFill>
@@ -1287,7 +1287,7 @@
         <a:srgbClr val="000000"/>
       </a:buClr>
       <a:buFont typeface="Arial"/>
-      <a:defRPr sz="1400" b="0" i="0" u="none" strike="noStrike" cap="none" spc="0">
+      <a:defRPr sz="909" b="0" i="0" u="none" strike="noStrike" cap="none" spc="0">
         <a:solidFill>
           <a:srgbClr val="000000"/>
         </a:solidFill>
@@ -1311,7 +1311,7 @@
         <a:srgbClr val="000000"/>
       </a:buClr>
       <a:buFont typeface="Arial"/>
-      <a:defRPr sz="1400" b="0" i="0" u="none" strike="noStrike" cap="none" spc="0">
+      <a:defRPr sz="909" b="0" i="0" u="none" strike="noStrike" cap="none" spc="0">
         <a:solidFill>
           <a:srgbClr val="000000"/>
         </a:solidFill>
@@ -1335,7 +1335,7 @@
         <a:srgbClr val="000000"/>
       </a:buClr>
       <a:buFont typeface="Arial"/>
-      <a:defRPr sz="1400" b="0" i="0" u="none" strike="noStrike" cap="none" spc="0">
+      <a:defRPr sz="909" b="0" i="0" u="none" strike="noStrike" cap="none" spc="0">
         <a:solidFill>
           <a:srgbClr val="000000"/>
         </a:solidFill>
@@ -1359,7 +1359,7 @@
         <a:srgbClr val="000000"/>
       </a:buClr>
       <a:buFont typeface="Arial"/>
-      <a:defRPr sz="1400" b="0" i="0" u="none" strike="noStrike" cap="none" spc="0">
+      <a:defRPr sz="909" b="0" i="0" u="none" strike="noStrike" cap="none" spc="0">
         <a:solidFill>
           <a:srgbClr val="000000"/>
         </a:solidFill>
@@ -1383,7 +1383,7 @@
         <a:srgbClr val="000000"/>
       </a:buClr>
       <a:buFont typeface="Arial"/>
-      <a:defRPr sz="1400" b="0" i="0" u="none" strike="noStrike" cap="none" spc="0">
+      <a:defRPr sz="909" b="0" i="0" u="none" strike="noStrike" cap="none" spc="0">
         <a:solidFill>
           <a:srgbClr val="000000"/>
         </a:solidFill>
@@ -1407,7 +1407,7 @@
         <a:srgbClr val="000000"/>
       </a:buClr>
       <a:buFont typeface="Arial"/>
-      <a:defRPr sz="1400" b="0" i="0" u="none" strike="noStrike" cap="none" spc="0">
+      <a:defRPr sz="909" b="0" i="0" u="none" strike="noStrike" cap="none" spc="0">
         <a:solidFill>
           <a:srgbClr val="000000"/>
         </a:solidFill>
@@ -1431,7 +1431,7 @@
         <a:srgbClr val="000000"/>
       </a:buClr>
       <a:buFont typeface="Arial"/>
-      <a:defRPr sz="1400" b="0" i="0" u="none" strike="noStrike" cap="none" spc="0">
+      <a:defRPr sz="909" b="0" i="0" u="none" strike="noStrike" cap="none" spc="0">
         <a:solidFill>
           <a:srgbClr val="000000"/>
         </a:solidFill>
@@ -1474,8 +1474,8 @@
         </p:nvSpPr>
         <p:spPr>
           <a:xfrm>
-            <a:off x="2338388" y="1143000"/>
-            <a:ext cx="2181225" cy="3086100"/>
+            <a:off x="912813" y="1617663"/>
+            <a:ext cx="3021012" cy="4365625"/>
           </a:xfrm>
           <a:custGeom>
             <a:avLst/>
@@ -1525,8 +1525,8 @@
         </p:nvSpPr>
         <p:spPr>
           <a:xfrm>
-            <a:off x="685800" y="4400550"/>
-            <a:ext cx="5486400" cy="3600450"/>
+            <a:off x="484674" y="6226651"/>
+            <a:ext cx="3877394" cy="5094532"/>
           </a:xfrm>
           <a:prstGeom prst="rect">
             <a:avLst/>
@@ -1567,8 +1567,8 @@
         </p:nvSpPr>
         <p:spPr>
           <a:xfrm>
-            <a:off x="3884613" y="8685213"/>
-            <a:ext cx="2971800" cy="458787"/>
+            <a:off x="2745366" y="12289326"/>
+            <a:ext cx="2100255" cy="649170"/>
           </a:xfrm>
           <a:prstGeom prst="rect">
             <a:avLst/>
@@ -1698,7 +1698,7 @@
           <a:srgbClr val="000000"/>
         </a:buClr>
         <a:buFont typeface="Arial"/>
-        <a:defRPr sz="1400" b="0" i="0" u="none" strike="noStrike" cap="none" spc="0">
+        <a:defRPr sz="898" b="0" i="0" u="none" strike="noStrike" cap="none" spc="0">
           <a:solidFill>
             <a:srgbClr val="000000"/>
           </a:solidFill>
@@ -1722,7 +1722,7 @@
           <a:srgbClr val="000000"/>
         </a:buClr>
         <a:buFont typeface="Arial"/>
-        <a:defRPr sz="1400" b="0" i="0" u="none" strike="noStrike" cap="none" spc="0">
+        <a:defRPr sz="898" b="0" i="0" u="none" strike="noStrike" cap="none" spc="0">
           <a:solidFill>
             <a:srgbClr val="000000"/>
           </a:solidFill>
@@ -1746,7 +1746,7 @@
           <a:srgbClr val="000000"/>
         </a:buClr>
         <a:buFont typeface="Arial"/>
-        <a:defRPr sz="1400" b="0" i="0" u="none" strike="noStrike" cap="none" spc="0">
+        <a:defRPr sz="898" b="0" i="0" u="none" strike="noStrike" cap="none" spc="0">
           <a:solidFill>
             <a:srgbClr val="000000"/>
           </a:solidFill>
@@ -1770,7 +1770,7 @@
           <a:srgbClr val="000000"/>
         </a:buClr>
         <a:buFont typeface="Arial"/>
-        <a:defRPr sz="1400" b="0" i="0" u="none" strike="noStrike" cap="none" spc="0">
+        <a:defRPr sz="898" b="0" i="0" u="none" strike="noStrike" cap="none" spc="0">
           <a:solidFill>
             <a:srgbClr val="000000"/>
           </a:solidFill>
@@ -1794,7 +1794,7 @@
           <a:srgbClr val="000000"/>
         </a:buClr>
         <a:buFont typeface="Arial"/>
-        <a:defRPr sz="1400" b="0" i="0" u="none" strike="noStrike" cap="none" spc="0">
+        <a:defRPr sz="898" b="0" i="0" u="none" strike="noStrike" cap="none" spc="0">
           <a:solidFill>
             <a:srgbClr val="000000"/>
           </a:solidFill>
@@ -1818,7 +1818,7 @@
           <a:srgbClr val="000000"/>
         </a:buClr>
         <a:buFont typeface="Arial"/>
-        <a:defRPr sz="1400" b="0" i="0" u="none" strike="noStrike" cap="none" spc="0">
+        <a:defRPr sz="898" b="0" i="0" u="none" strike="noStrike" cap="none" spc="0">
           <a:solidFill>
             <a:srgbClr val="000000"/>
           </a:solidFill>
@@ -1842,7 +1842,7 @@
           <a:srgbClr val="000000"/>
         </a:buClr>
         <a:buFont typeface="Arial"/>
-        <a:defRPr sz="1400" b="0" i="0" u="none" strike="noStrike" cap="none" spc="0">
+        <a:defRPr sz="898" b="0" i="0" u="none" strike="noStrike" cap="none" spc="0">
           <a:solidFill>
             <a:srgbClr val="000000"/>
           </a:solidFill>
@@ -1866,7 +1866,7 @@
           <a:srgbClr val="000000"/>
         </a:buClr>
         <a:buFont typeface="Arial"/>
-        <a:defRPr sz="1400" b="0" i="0" u="none" strike="noStrike" cap="none" spc="0">
+        <a:defRPr sz="898" b="0" i="0" u="none" strike="noStrike" cap="none" spc="0">
           <a:solidFill>
             <a:srgbClr val="000000"/>
           </a:solidFill>
@@ -1890,7 +1890,7 @@
           <a:srgbClr val="000000"/>
         </a:buClr>
         <a:buFont typeface="Arial"/>
-        <a:defRPr sz="1400" b="0" i="0" u="none" strike="noStrike" cap="none" spc="0">
+        <a:defRPr sz="898" b="0" i="0" u="none" strike="noStrike" cap="none" spc="0">
           <a:solidFill>
             <a:srgbClr val="000000"/>
           </a:solidFill>
@@ -1927,7 +1927,7 @@
           <a:srgbClr val="000000"/>
         </a:buClr>
         <a:buFont typeface="Arial"/>
-        <a:defRPr sz="1400" b="0" i="0" u="none" strike="noStrike" cap="none" spc="0">
+        <a:defRPr sz="898" b="0" i="0" u="none" strike="noStrike" cap="none" spc="0">
           <a:solidFill>
             <a:srgbClr val="000000"/>
           </a:solidFill>
@@ -1951,7 +1951,7 @@
           <a:srgbClr val="000000"/>
         </a:buClr>
         <a:buFont typeface="Arial"/>
-        <a:defRPr sz="1400" b="0" i="0" u="none" strike="noStrike" cap="none" spc="0">
+        <a:defRPr sz="898" b="0" i="0" u="none" strike="noStrike" cap="none" spc="0">
           <a:solidFill>
             <a:srgbClr val="000000"/>
           </a:solidFill>
@@ -1975,7 +1975,7 @@
           <a:srgbClr val="000000"/>
         </a:buClr>
         <a:buFont typeface="Arial"/>
-        <a:defRPr sz="1400" b="0" i="0" u="none" strike="noStrike" cap="none" spc="0">
+        <a:defRPr sz="898" b="0" i="0" u="none" strike="noStrike" cap="none" spc="0">
           <a:solidFill>
             <a:srgbClr val="000000"/>
           </a:solidFill>
@@ -1999,7 +1999,7 @@
           <a:srgbClr val="000000"/>
         </a:buClr>
         <a:buFont typeface="Arial"/>
-        <a:defRPr sz="1400" b="0" i="0" u="none" strike="noStrike" cap="none" spc="0">
+        <a:defRPr sz="898" b="0" i="0" u="none" strike="noStrike" cap="none" spc="0">
           <a:solidFill>
             <a:srgbClr val="000000"/>
           </a:solidFill>
@@ -2023,7 +2023,7 @@
           <a:srgbClr val="000000"/>
         </a:buClr>
         <a:buFont typeface="Arial"/>
-        <a:defRPr sz="1400" b="0" i="0" u="none" strike="noStrike" cap="none" spc="0">
+        <a:defRPr sz="898" b="0" i="0" u="none" strike="noStrike" cap="none" spc="0">
           <a:solidFill>
             <a:srgbClr val="000000"/>
           </a:solidFill>
@@ -2047,7 +2047,7 @@
           <a:srgbClr val="000000"/>
         </a:buClr>
         <a:buFont typeface="Arial"/>
-        <a:defRPr sz="1400" b="0" i="0" u="none" strike="noStrike" cap="none" spc="0">
+        <a:defRPr sz="898" b="0" i="0" u="none" strike="noStrike" cap="none" spc="0">
           <a:solidFill>
             <a:srgbClr val="000000"/>
           </a:solidFill>
@@ -2071,7 +2071,7 @@
           <a:srgbClr val="000000"/>
         </a:buClr>
         <a:buFont typeface="Arial"/>
-        <a:defRPr sz="1400" b="0" i="0" u="none" strike="noStrike" cap="none" spc="0">
+        <a:defRPr sz="898" b="0" i="0" u="none" strike="noStrike" cap="none" spc="0">
           <a:solidFill>
             <a:srgbClr val="000000"/>
           </a:solidFill>
@@ -2095,7 +2095,7 @@
           <a:srgbClr val="000000"/>
         </a:buClr>
         <a:buFont typeface="Arial"/>
-        <a:defRPr sz="1400" b="0" i="0" u="none" strike="noStrike" cap="none" spc="0">
+        <a:defRPr sz="898" b="0" i="0" u="none" strike="noStrike" cap="none" spc="0">
           <a:solidFill>
             <a:srgbClr val="000000"/>
           </a:solidFill>
@@ -2119,7 +2119,7 @@
           <a:srgbClr val="000000"/>
         </a:buClr>
         <a:buFont typeface="Arial"/>
-        <a:defRPr sz="1400" b="0" i="0" u="none" strike="noStrike" cap="none" spc="0">
+        <a:defRPr sz="898" b="0" i="0" u="none" strike="noStrike" cap="none" spc="0">
           <a:solidFill>
             <a:srgbClr val="000000"/>
           </a:solidFill>
@@ -2156,7 +2156,7 @@
           <a:srgbClr val="000000"/>
         </a:buClr>
         <a:buFont typeface="Arial"/>
-        <a:defRPr sz="1400" b="0" i="0" u="none" strike="noStrike" cap="none" spc="0">
+        <a:defRPr sz="898" b="0" i="0" u="none" strike="noStrike" cap="none" spc="0">
           <a:solidFill>
             <a:srgbClr val="000000"/>
           </a:solidFill>
@@ -2180,7 +2180,7 @@
           <a:srgbClr val="000000"/>
         </a:buClr>
         <a:buFont typeface="Arial"/>
-        <a:defRPr sz="1400" b="0" i="0" u="none" strike="noStrike" cap="none" spc="0">
+        <a:defRPr sz="898" b="0" i="0" u="none" strike="noStrike" cap="none" spc="0">
           <a:solidFill>
             <a:srgbClr val="000000"/>
           </a:solidFill>
@@ -2204,7 +2204,7 @@
           <a:srgbClr val="000000"/>
         </a:buClr>
         <a:buFont typeface="Arial"/>
-        <a:defRPr sz="1400" b="0" i="0" u="none" strike="noStrike" cap="none" spc="0">
+        <a:defRPr sz="898" b="0" i="0" u="none" strike="noStrike" cap="none" spc="0">
           <a:solidFill>
             <a:srgbClr val="000000"/>
           </a:solidFill>
@@ -2228,7 +2228,7 @@
           <a:srgbClr val="000000"/>
         </a:buClr>
         <a:buFont typeface="Arial"/>
-        <a:defRPr sz="1400" b="0" i="0" u="none" strike="noStrike" cap="none" spc="0">
+        <a:defRPr sz="898" b="0" i="0" u="none" strike="noStrike" cap="none" spc="0">
           <a:solidFill>
             <a:srgbClr val="000000"/>
           </a:solidFill>
@@ -2252,7 +2252,7 @@
           <a:srgbClr val="000000"/>
         </a:buClr>
         <a:buFont typeface="Arial"/>
-        <a:defRPr sz="1400" b="0" i="0" u="none" strike="noStrike" cap="none" spc="0">
+        <a:defRPr sz="898" b="0" i="0" u="none" strike="noStrike" cap="none" spc="0">
           <a:solidFill>
             <a:srgbClr val="000000"/>
           </a:solidFill>
@@ -2276,7 +2276,7 @@
           <a:srgbClr val="000000"/>
         </a:buClr>
         <a:buFont typeface="Arial"/>
-        <a:defRPr sz="1400" b="0" i="0" u="none" strike="noStrike" cap="none" spc="0">
+        <a:defRPr sz="898" b="0" i="0" u="none" strike="noStrike" cap="none" spc="0">
           <a:solidFill>
             <a:srgbClr val="000000"/>
           </a:solidFill>
@@ -2300,7 +2300,7 @@
           <a:srgbClr val="000000"/>
         </a:buClr>
         <a:buFont typeface="Arial"/>
-        <a:defRPr sz="1400" b="0" i="0" u="none" strike="noStrike" cap="none" spc="0">
+        <a:defRPr sz="898" b="0" i="0" u="none" strike="noStrike" cap="none" spc="0">
           <a:solidFill>
             <a:srgbClr val="000000"/>
           </a:solidFill>
@@ -2324,7 +2324,7 @@
           <a:srgbClr val="000000"/>
         </a:buClr>
         <a:buFont typeface="Arial"/>
-        <a:defRPr sz="1400" b="0" i="0" u="none" strike="noStrike" cap="none" spc="0">
+        <a:defRPr sz="898" b="0" i="0" u="none" strike="noStrike" cap="none" spc="0">
           <a:solidFill>
             <a:srgbClr val="000000"/>
           </a:solidFill>
@@ -2348,7 +2348,7 @@
           <a:srgbClr val="000000"/>
         </a:buClr>
         <a:buFont typeface="Arial"/>
-        <a:defRPr sz="1400" b="0" i="0" u="none" strike="noStrike" cap="none" spc="0">
+        <a:defRPr sz="898" b="0" i="0" u="none" strike="noStrike" cap="none" spc="0">
           <a:solidFill>
             <a:srgbClr val="000000"/>
           </a:solidFill>
@@ -2401,8 +2401,8 @@
         </p:nvSpPr>
         <p:spPr>
           <a:xfrm>
-            <a:off x="651675" y="743818"/>
-            <a:ext cx="9397800" cy="365700"/>
+            <a:off x="418125" y="578310"/>
+            <a:ext cx="6029778" cy="234639"/>
           </a:xfrm>
           <a:prstGeom prst="rect">
             <a:avLst/>
@@ -2413,27 +2413,22 @@
           </a:ln>
         </p:spPr>
         <p:txBody>
-          <a:bodyPr spcFirstLastPara="1" wrap="square" lIns="36576" tIns="36576" rIns="36576" bIns="36576" anchor="ctr" anchorCtr="0">
+          <a:bodyPr spcFirstLastPara="1" wrap="square" lIns="23468" tIns="23468" rIns="23468" bIns="23468" anchor="ctr" anchorCtr="0">
             <a:noAutofit/>
           </a:bodyPr>
           <a:lstStyle/>
           <a:p>
-            <a:pPr marL="0" marR="0" lvl="0" indent="0" algn="ctr" rtl="0">
-              <a:spcBef>
-                <a:spcPts val="0"/>
-              </a:spcBef>
-              <a:spcAft>
-                <a:spcPts val="200"/>
+            <a:pPr algn="ctr">
+              <a:spcAft>
+                <a:spcPts val="128"/>
               </a:spcAft>
               <a:buClr>
                 <a:srgbClr val="FFFFFF"/>
               </a:buClr>
               <a:buSzPts val="2600"/>
-              <a:buFont typeface="Cambria"/>
-              <a:buNone/>
             </a:pPr>
             <a:r>
-              <a:rPr sz="1500" b="1">
+              <a:rPr sz="962" b="1">
                 <a:solidFill>
                   <a:srgbClr val="FFFFFF"/>
                 </a:solidFill>
@@ -2441,7 +2436,7 @@
               </a:rPr>
               <a:t>Department of Computer Engineering</a:t>
             </a:r>
-            <a:endParaRPr sz="2300" b="1" i="0" u="none" strike="noStrike" cap="none">
+            <a:endParaRPr sz="1476" b="1">
               <a:solidFill>
                 <a:srgbClr val="D9D2E9"/>
               </a:solidFill>
@@ -2461,8 +2456,8 @@
         </p:nvSpPr>
         <p:spPr>
           <a:xfrm>
-            <a:off x="2029097" y="1228954"/>
-            <a:ext cx="6300300" cy="395100"/>
+            <a:off x="1301901" y="889581"/>
+            <a:ext cx="4042373" cy="253502"/>
           </a:xfrm>
           <a:prstGeom prst="rect">
             <a:avLst/>
@@ -2473,27 +2468,22 @@
           </a:ln>
         </p:spPr>
         <p:txBody>
-          <a:bodyPr spcFirstLastPara="1" wrap="square" lIns="36576" tIns="36576" rIns="36576" bIns="36576" anchor="ctr" anchorCtr="0">
+          <a:bodyPr spcFirstLastPara="1" wrap="square" lIns="23468" tIns="23468" rIns="23468" bIns="23468" anchor="ctr" anchorCtr="0">
             <a:noAutofit/>
           </a:bodyPr>
           <a:lstStyle/>
           <a:p>
-            <a:pPr marL="0" marR="0" lvl="0" indent="0" algn="ctr" rtl="0">
-              <a:spcBef>
-                <a:spcPts val="0"/>
-              </a:spcBef>
-              <a:spcAft>
-                <a:spcPts val="200"/>
+            <a:pPr algn="ctr">
+              <a:spcAft>
+                <a:spcPts val="128"/>
               </a:spcAft>
               <a:buClr>
                 <a:srgbClr val="F28C28"/>
               </a:buClr>
               <a:buSzPts val="1500"/>
-              <a:buFont typeface="Calibri"/>
-              <a:buNone/>
             </a:pPr>
             <a:r>
-              <a:rPr sz="2100" b="1">
+              <a:rPr sz="1347" b="1">
                 <a:solidFill>
                   <a:srgbClr val="148984"/>
                 </a:solidFill>
@@ -2501,7 +2491,7 @@
               </a:rPr>
               <a:t>NIRMAN LAB EXHIBITION 2026</a:t>
             </a:r>
-            <a:endParaRPr sz="2200" b="0" i="0" u="none" strike="noStrike" cap="none">
+            <a:endParaRPr sz="1412">
               <a:solidFill>
                 <a:schemeClr val="dk1"/>
               </a:solidFill>
@@ -2521,8 +2511,8 @@
         </p:nvSpPr>
         <p:spPr>
           <a:xfrm>
-            <a:off x="243884" y="1584550"/>
-            <a:ext cx="10258200" cy="949200"/>
+            <a:off x="156480" y="1117737"/>
+            <a:ext cx="6581824" cy="609022"/>
           </a:xfrm>
           <a:prstGeom prst="rect">
             <a:avLst/>
@@ -2533,27 +2523,22 @@
           </a:ln>
         </p:spPr>
         <p:txBody>
-          <a:bodyPr spcFirstLastPara="1" wrap="square" lIns="36576" tIns="36576" rIns="36576" bIns="36576" anchor="ctr" anchorCtr="0">
+          <a:bodyPr spcFirstLastPara="1" wrap="square" lIns="23468" tIns="23468" rIns="23468" bIns="23468" anchor="ctr" anchorCtr="0">
             <a:noAutofit/>
           </a:bodyPr>
           <a:lstStyle/>
           <a:p>
-            <a:pPr marL="0" marR="0" lvl="0" indent="0" algn="ctr" rtl="0">
-              <a:spcBef>
-                <a:spcPts val="0"/>
-              </a:spcBef>
-              <a:spcAft>
-                <a:spcPts val="200"/>
+            <a:pPr algn="ctr">
+              <a:spcAft>
+                <a:spcPts val="128"/>
               </a:spcAft>
               <a:buClr>
                 <a:srgbClr val="FFFFFF"/>
               </a:buClr>
               <a:buSzPts val="4158"/>
-              <a:buFont typeface="Cambria"/>
-              <a:buNone/>
             </a:pPr>
             <a:r>
-              <a:rPr sz="3400" b="1">
+              <a:rPr sz="2181" b="1">
                 <a:solidFill>
                   <a:srgbClr val="FFFFFF"/>
                 </a:solidFill>
@@ -2561,7 +2546,7 @@
               </a:rPr>
               <a:t>PM-JAY CLAIM GPS</a:t>
             </a:r>
-            <a:endParaRPr sz="3118" b="0" i="0" u="none" strike="noStrike" cap="none">
+            <a:endParaRPr sz="2001">
               <a:solidFill>
                 <a:schemeClr val="dk1"/>
               </a:solidFill>
@@ -2581,8 +2566,8 @@
         </p:nvSpPr>
         <p:spPr>
           <a:xfrm>
-            <a:off x="224098" y="2627966"/>
-            <a:ext cx="2314500" cy="1045500"/>
+            <a:off x="143785" y="1787210"/>
+            <a:ext cx="1485020" cy="670809"/>
           </a:xfrm>
           <a:prstGeom prst="roundRect">
             <a:avLst>
@@ -2610,21 +2595,12 @@
           </a:effectLst>
         </p:spPr>
         <p:txBody>
-          <a:bodyPr spcFirstLastPara="1" wrap="square" lIns="95025" tIns="95025" rIns="95025" bIns="95025" anchor="ctr" anchorCtr="0">
+          <a:bodyPr spcFirstLastPara="1" wrap="square" lIns="60970" tIns="60970" rIns="60970" bIns="60970" anchor="ctr" anchorCtr="0">
             <a:noAutofit/>
           </a:bodyPr>
           <a:lstStyle/>
           <a:p>
-            <a:pPr marL="0" lvl="0" indent="0" algn="l" rtl="0">
-              <a:spcBef>
-                <a:spcPts val="0"/>
-              </a:spcBef>
-              <a:spcAft>
-                <a:spcPts val="0"/>
-              </a:spcAft>
-              <a:buNone/>
-            </a:pPr>
-            <a:endParaRPr/>
+            <a:endParaRPr sz="583"/>
           </a:p>
         </p:txBody>
       </p:sp>
@@ -2636,8 +2612,8 @@
         </p:nvSpPr>
         <p:spPr>
           <a:xfrm>
-            <a:off x="275281" y="2890827"/>
-            <a:ext cx="2361998" cy="475200"/>
+            <a:off x="176624" y="1955865"/>
+            <a:ext cx="1515496" cy="304896"/>
           </a:xfrm>
           <a:prstGeom prst="rect">
             <a:avLst/>
@@ -2648,27 +2624,22 @@
           </a:ln>
         </p:spPr>
         <p:txBody>
-          <a:bodyPr spcFirstLastPara="1" wrap="square" lIns="36576" tIns="36576" rIns="36576" bIns="36576" anchor="ctr" anchorCtr="0">
+          <a:bodyPr spcFirstLastPara="1" wrap="square" lIns="23468" tIns="23468" rIns="23468" bIns="23468" anchor="ctr" anchorCtr="0">
             <a:noAutofit/>
           </a:bodyPr>
           <a:lstStyle/>
           <a:p>
-            <a:pPr marL="0" marR="0" lvl="0" indent="0" algn="l" rtl="0">
-              <a:spcBef>
-                <a:spcPts val="0"/>
-              </a:spcBef>
-              <a:spcAft>
-                <a:spcPts val="200"/>
+            <a:pPr>
+              <a:spcAft>
+                <a:spcPts val="128"/>
               </a:spcAft>
               <a:buClr>
                 <a:srgbClr val="13243A"/>
               </a:buClr>
               <a:buSzPts val="1663"/>
-              <a:buFont typeface="Calibri"/>
-              <a:buNone/>
             </a:pPr>
             <a:r>
-              <a:rPr sz="1500" b="1" dirty="0">
+              <a:rPr sz="962" b="1" dirty="0">
                 <a:solidFill>
                   <a:srgbClr val="14304B"/>
                 </a:solidFill>
@@ -2676,7 +2647,7 @@
               </a:rPr>
               <a:t>AVDHUT PARISH MADHAVI</a:t>
             </a:r>
-            <a:endParaRPr sz="1871" b="0" i="0" u="none" strike="noStrike" cap="none" dirty="0">
+            <a:endParaRPr sz="1200" dirty="0">
               <a:solidFill>
                 <a:schemeClr val="dk1"/>
               </a:solidFill>
@@ -2696,8 +2667,8 @@
         </p:nvSpPr>
         <p:spPr>
           <a:xfrm>
-            <a:off x="2776104" y="2627966"/>
-            <a:ext cx="2314500" cy="1045500"/>
+            <a:off x="1781192" y="1787210"/>
+            <a:ext cx="1485020" cy="670809"/>
           </a:xfrm>
           <a:prstGeom prst="roundRect">
             <a:avLst>
@@ -2725,21 +2696,12 @@
           </a:effectLst>
         </p:spPr>
         <p:txBody>
-          <a:bodyPr spcFirstLastPara="1" wrap="square" lIns="95025" tIns="95025" rIns="95025" bIns="95025" anchor="ctr" anchorCtr="0">
+          <a:bodyPr spcFirstLastPara="1" wrap="square" lIns="60970" tIns="60970" rIns="60970" bIns="60970" anchor="ctr" anchorCtr="0">
             <a:noAutofit/>
           </a:bodyPr>
           <a:lstStyle/>
           <a:p>
-            <a:pPr marL="0" lvl="0" indent="0" algn="l" rtl="0">
-              <a:spcBef>
-                <a:spcPts val="0"/>
-              </a:spcBef>
-              <a:spcAft>
-                <a:spcPts val="0"/>
-              </a:spcAft>
-              <a:buNone/>
-            </a:pPr>
-            <a:endParaRPr/>
+            <a:endParaRPr sz="583"/>
           </a:p>
         </p:txBody>
       </p:sp>
@@ -2751,8 +2713,8 @@
         </p:nvSpPr>
         <p:spPr>
           <a:xfrm>
-            <a:off x="3225213" y="2915938"/>
-            <a:ext cx="2364287" cy="475200"/>
+            <a:off x="2069348" y="1971977"/>
+            <a:ext cx="1516964" cy="304896"/>
           </a:xfrm>
           <a:prstGeom prst="rect">
             <a:avLst/>
@@ -2763,27 +2725,22 @@
           </a:ln>
         </p:spPr>
         <p:txBody>
-          <a:bodyPr spcFirstLastPara="1" wrap="square" lIns="36576" tIns="36576" rIns="36576" bIns="36576" anchor="ctr" anchorCtr="0">
+          <a:bodyPr spcFirstLastPara="1" wrap="square" lIns="23468" tIns="23468" rIns="23468" bIns="23468" anchor="ctr" anchorCtr="0">
             <a:noAutofit/>
           </a:bodyPr>
           <a:lstStyle/>
           <a:p>
-            <a:pPr marL="0" marR="0" lvl="0" indent="0" algn="l" rtl="0">
-              <a:spcBef>
-                <a:spcPts val="0"/>
-              </a:spcBef>
-              <a:spcAft>
-                <a:spcPts val="200"/>
+            <a:pPr>
+              <a:spcAft>
+                <a:spcPts val="128"/>
               </a:spcAft>
               <a:buClr>
                 <a:srgbClr val="13243A"/>
               </a:buClr>
               <a:buSzPts val="1663"/>
-              <a:buFont typeface="Calibri"/>
-              <a:buNone/>
             </a:pPr>
             <a:r>
-              <a:rPr b="1" dirty="0">
+              <a:rPr sz="583" b="1" dirty="0">
                 <a:solidFill>
                   <a:srgbClr val="14304B"/>
                 </a:solidFill>
@@ -2791,7 +2748,7 @@
               </a:rPr>
               <a:t>SEM III  •  DIV C2  •  TU3S2627005</a:t>
             </a:r>
-            <a:endParaRPr sz="2800" b="0" i="0" u="none" strike="noStrike" cap="none" dirty="0">
+            <a:endParaRPr sz="1796" dirty="0">
               <a:solidFill>
                 <a:schemeClr val="dk1"/>
               </a:solidFill>
@@ -2811,8 +2768,8 @@
         </p:nvSpPr>
         <p:spPr>
           <a:xfrm>
-            <a:off x="5470695" y="2601642"/>
-            <a:ext cx="2314500" cy="1045500"/>
+            <a:off x="3510085" y="1770320"/>
+            <a:ext cx="1485020" cy="670809"/>
           </a:xfrm>
           <a:prstGeom prst="roundRect">
             <a:avLst>
@@ -2840,21 +2797,12 @@
           </a:effectLst>
         </p:spPr>
         <p:txBody>
-          <a:bodyPr spcFirstLastPara="1" wrap="square" lIns="95025" tIns="95025" rIns="95025" bIns="95025" anchor="ctr" anchorCtr="0">
+          <a:bodyPr spcFirstLastPara="1" wrap="square" lIns="60970" tIns="60970" rIns="60970" bIns="60970" anchor="ctr" anchorCtr="0">
             <a:noAutofit/>
           </a:bodyPr>
           <a:lstStyle/>
           <a:p>
-            <a:pPr marL="0" lvl="0" indent="0" algn="l" rtl="0">
-              <a:spcBef>
-                <a:spcPts val="0"/>
-              </a:spcBef>
-              <a:spcAft>
-                <a:spcPts val="0"/>
-              </a:spcAft>
-              <a:buNone/>
-            </a:pPr>
-            <a:endParaRPr/>
+            <a:endParaRPr sz="583"/>
           </a:p>
         </p:txBody>
       </p:sp>
@@ -2866,8 +2814,8 @@
         </p:nvSpPr>
         <p:spPr>
           <a:xfrm>
-            <a:off x="5720147" y="2859987"/>
-            <a:ext cx="1934400" cy="475200"/>
+            <a:off x="3670137" y="1936078"/>
+            <a:ext cx="1241142" cy="304896"/>
           </a:xfrm>
           <a:prstGeom prst="rect">
             <a:avLst/>
@@ -2878,14 +2826,14 @@
           </a:ln>
         </p:spPr>
         <p:txBody>
-          <a:bodyPr spcFirstLastPara="1" wrap="square" lIns="36576" tIns="36576" rIns="36576" bIns="36576" anchor="ctr" anchorCtr="0">
+          <a:bodyPr spcFirstLastPara="1" wrap="square" lIns="23468" tIns="23468" rIns="23468" bIns="23468" anchor="ctr" anchorCtr="0">
             <a:noAutofit/>
           </a:bodyPr>
           <a:lstStyle/>
           <a:p>
-            <a:pPr lvl="0">
-              <a:spcAft>
-                <a:spcPts val="200"/>
+            <a:pPr>
+              <a:spcAft>
+                <a:spcPts val="128"/>
               </a:spcAft>
               <a:buClr>
                 <a:srgbClr val="13243A"/>
@@ -2893,11 +2841,11 @@
               <a:buSzPts val="1663"/>
             </a:pPr>
             <a:r>
-              <a:rPr lang="en-IN" sz="1600" dirty="0"/>
+              <a:rPr lang="en-IN" sz="1027" dirty="0"/>
               <a:t>Arogya Pranali: </a:t>
             </a:r>
             <a:r>
-              <a:rPr lang="en-IN" sz="1500" b="1" dirty="0">
+              <a:rPr lang="en-IN" sz="962" b="1" dirty="0">
                 <a:solidFill>
                   <a:srgbClr val="14304B"/>
                 </a:solidFill>
@@ -2906,10 +2854,10 @@
               <a:t>Intelligent</a:t>
             </a:r>
             <a:r>
-              <a:rPr lang="en-IN" sz="1600" dirty="0"/>
+              <a:rPr lang="en-IN" sz="1027" dirty="0"/>
               <a:t> Health Systems for Bharat</a:t>
             </a:r>
-            <a:endParaRPr lang="en-IN" sz="2800" dirty="0">
+            <a:endParaRPr lang="en-IN" sz="1796" dirty="0">
               <a:solidFill>
                 <a:schemeClr val="dk1"/>
               </a:solidFill>
@@ -2929,8 +2877,8 @@
         </p:nvSpPr>
         <p:spPr>
           <a:xfrm>
-            <a:off x="8022700" y="2601642"/>
-            <a:ext cx="2314500" cy="1045500"/>
+            <a:off x="5147492" y="1770320"/>
+            <a:ext cx="1485020" cy="670809"/>
           </a:xfrm>
           <a:prstGeom prst="roundRect">
             <a:avLst>
@@ -2958,21 +2906,12 @@
           </a:effectLst>
         </p:spPr>
         <p:txBody>
-          <a:bodyPr spcFirstLastPara="1" wrap="square" lIns="95025" tIns="95025" rIns="95025" bIns="95025" anchor="ctr" anchorCtr="0">
+          <a:bodyPr spcFirstLastPara="1" wrap="square" lIns="60970" tIns="60970" rIns="60970" bIns="60970" anchor="ctr" anchorCtr="0">
             <a:noAutofit/>
           </a:bodyPr>
           <a:lstStyle/>
           <a:p>
-            <a:pPr marL="0" lvl="0" indent="0" algn="l" rtl="0">
-              <a:spcBef>
-                <a:spcPts val="0"/>
-              </a:spcBef>
-              <a:spcAft>
-                <a:spcPts val="0"/>
-              </a:spcAft>
-              <a:buNone/>
-            </a:pPr>
-            <a:endParaRPr/>
+            <a:endParaRPr sz="583"/>
           </a:p>
         </p:txBody>
       </p:sp>
@@ -2984,8 +2923,8 @@
         </p:nvSpPr>
         <p:spPr>
           <a:xfrm>
-            <a:off x="8165275" y="2561450"/>
-            <a:ext cx="600000" cy="777300"/>
+            <a:off x="5238970" y="1744532"/>
+            <a:ext cx="384970" cy="498728"/>
           </a:xfrm>
           <a:prstGeom prst="rect">
             <a:avLst/>
@@ -2996,27 +2935,22 @@
           </a:ln>
         </p:spPr>
         <p:txBody>
-          <a:bodyPr spcFirstLastPara="1" wrap="square" lIns="36576" tIns="36576" rIns="36576" bIns="36576" anchor="ctr" anchorCtr="0">
+          <a:bodyPr spcFirstLastPara="1" wrap="square" lIns="23468" tIns="23468" rIns="23468" bIns="23468" anchor="ctr" anchorCtr="0">
             <a:noAutofit/>
           </a:bodyPr>
           <a:lstStyle/>
           <a:p>
-            <a:pPr marL="0" marR="0" lvl="0" indent="0" algn="l" rtl="0">
-              <a:spcBef>
-                <a:spcPts val="0"/>
-              </a:spcBef>
-              <a:spcAft>
-                <a:spcPts val="200"/>
+            <a:pPr>
+              <a:spcAft>
+                <a:spcPts val="128"/>
               </a:spcAft>
               <a:buClr>
                 <a:srgbClr val="FFFFFF"/>
               </a:buClr>
               <a:buSzPts val="3118"/>
-              <a:buFont typeface="Cambria"/>
-              <a:buNone/>
             </a:pPr>
             <a:r>
-              <a:rPr sz="3400" b="1">
+              <a:rPr sz="2181" b="1">
                 <a:solidFill>
                   <a:srgbClr val="FFFFFF"/>
                 </a:solidFill>
@@ -3024,7 +2958,7 @@
               </a:rPr>
               <a:t>3</a:t>
             </a:r>
-            <a:endParaRPr sz="3326" b="0" i="0" u="none" strike="noStrike" cap="none">
+            <a:endParaRPr sz="2134">
               <a:solidFill>
                 <a:schemeClr val="dk1"/>
               </a:solidFill>
@@ -3044,8 +2978,8 @@
         </p:nvSpPr>
         <p:spPr>
           <a:xfrm>
-            <a:off x="8973168" y="2696690"/>
-            <a:ext cx="1268700" cy="855300"/>
+            <a:off x="5757327" y="1831304"/>
+            <a:ext cx="814018" cy="548774"/>
           </a:xfrm>
           <a:prstGeom prst="rect">
             <a:avLst/>
@@ -3056,27 +2990,22 @@
           </a:ln>
         </p:spPr>
         <p:txBody>
-          <a:bodyPr spcFirstLastPara="1" wrap="square" lIns="36576" tIns="36576" rIns="36576" bIns="36576" anchor="ctr" anchorCtr="0">
+          <a:bodyPr spcFirstLastPara="1" wrap="square" lIns="23468" tIns="23468" rIns="23468" bIns="23468" anchor="ctr" anchorCtr="0">
             <a:noAutofit/>
           </a:bodyPr>
           <a:lstStyle/>
           <a:p>
-            <a:pPr marL="0" marR="0" lvl="0" indent="0" algn="l" rtl="0">
-              <a:spcBef>
-                <a:spcPts val="0"/>
-              </a:spcBef>
-              <a:spcAft>
-                <a:spcPts val="200"/>
+            <a:pPr>
+              <a:spcAft>
+                <a:spcPts val="128"/>
               </a:spcAft>
               <a:buClr>
                 <a:srgbClr val="FFFFFF"/>
               </a:buClr>
               <a:buSzPts val="1039"/>
-              <a:buFont typeface="Calibri"/>
-              <a:buNone/>
             </a:pPr>
             <a:r>
-              <a:rPr sz="1050" b="1">
+              <a:rPr sz="674" b="1">
                 <a:solidFill>
                   <a:srgbClr val="14304B"/>
                 </a:solidFill>
@@ -3084,7 +3013,7 @@
               </a:rPr>
               <a:t>UN SDG GOAL</a:t>
             </a:r>
-            <a:endParaRPr sz="1559" b="0" i="0" u="none" strike="noStrike" cap="none">
+            <a:endParaRPr sz="1000">
               <a:solidFill>
                 <a:schemeClr val="dk1"/>
               </a:solidFill>
@@ -3097,11 +3026,11 @@
           <a:p>
             <a:pPr>
               <a:spcAft>
-                <a:spcPts val="200"/>
+                <a:spcPts val="128"/>
               </a:spcAft>
             </a:pPr>
             <a:r>
-              <a:rPr sz="1050" b="1">
+              <a:rPr sz="674" b="1">
                 <a:solidFill>
                   <a:srgbClr val="14304B"/>
                 </a:solidFill>
@@ -3120,8 +3049,8 @@
         </p:nvSpPr>
         <p:spPr>
           <a:xfrm>
-            <a:off x="265625" y="4066700"/>
-            <a:ext cx="4919100" cy="1874400"/>
+            <a:off x="170429" y="2710324"/>
+            <a:ext cx="3156173" cy="1202645"/>
           </a:xfrm>
           <a:prstGeom prst="roundRect">
             <a:avLst>
@@ -3149,21 +3078,12 @@
           </a:effectLst>
         </p:spPr>
         <p:txBody>
-          <a:bodyPr spcFirstLastPara="1" wrap="square" lIns="91425" tIns="91425" rIns="91425" bIns="91425" anchor="ctr" anchorCtr="0">
+          <a:bodyPr spcFirstLastPara="1" wrap="square" lIns="58660" tIns="58660" rIns="58660" bIns="58660" anchor="ctr" anchorCtr="0">
             <a:noAutofit/>
           </a:bodyPr>
           <a:lstStyle/>
           <a:p>
-            <a:pPr marL="0" lvl="0" indent="0" algn="l" rtl="0">
-              <a:spcBef>
-                <a:spcPts val="0"/>
-              </a:spcBef>
-              <a:spcAft>
-                <a:spcPts val="0"/>
-              </a:spcAft>
-              <a:buNone/>
-            </a:pPr>
-            <a:endParaRPr/>
+            <a:endParaRPr sz="583"/>
           </a:p>
         </p:txBody>
       </p:sp>
@@ -3175,8 +3095,8 @@
         </p:nvSpPr>
         <p:spPr>
           <a:xfrm>
-            <a:off x="508181" y="4267868"/>
-            <a:ext cx="533700" cy="502800"/>
+            <a:off x="326057" y="2839397"/>
+            <a:ext cx="342430" cy="322604"/>
           </a:xfrm>
           <a:prstGeom prst="ellipse">
             <a:avLst/>
@@ -3193,21 +3113,12 @@
           </a:ln>
         </p:spPr>
         <p:txBody>
-          <a:bodyPr spcFirstLastPara="1" wrap="square" lIns="91425" tIns="91425" rIns="91425" bIns="91425" anchor="ctr" anchorCtr="0">
+          <a:bodyPr spcFirstLastPara="1" wrap="square" lIns="58660" tIns="58660" rIns="58660" bIns="58660" anchor="ctr" anchorCtr="0">
             <a:noAutofit/>
           </a:bodyPr>
           <a:lstStyle/>
           <a:p>
-            <a:pPr marL="0" lvl="0" indent="0" algn="l" rtl="0">
-              <a:spcBef>
-                <a:spcPts val="0"/>
-              </a:spcBef>
-              <a:spcAft>
-                <a:spcPts val="0"/>
-              </a:spcAft>
-              <a:buNone/>
-            </a:pPr>
-            <a:endParaRPr/>
+            <a:endParaRPr sz="583"/>
           </a:p>
         </p:txBody>
       </p:sp>
@@ -3219,8 +3130,8 @@
         </p:nvSpPr>
         <p:spPr>
           <a:xfrm>
-            <a:off x="508181" y="4267868"/>
-            <a:ext cx="533700" cy="502800"/>
+            <a:off x="326057" y="2839397"/>
+            <a:ext cx="342430" cy="322604"/>
           </a:xfrm>
           <a:prstGeom prst="rect">
             <a:avLst/>
@@ -3236,22 +3147,17 @@
           </a:bodyPr>
           <a:lstStyle/>
           <a:p>
-            <a:pPr marL="0" marR="0" lvl="0" indent="0" algn="ctr" rtl="0">
-              <a:spcBef>
-                <a:spcPts val="0"/>
-              </a:spcBef>
-              <a:spcAft>
-                <a:spcPts val="200"/>
+            <a:pPr algn="ctr">
+              <a:spcAft>
+                <a:spcPts val="128"/>
               </a:spcAft>
               <a:buClr>
                 <a:srgbClr val="FFFFFF"/>
               </a:buClr>
               <a:buSzPts val="1400"/>
-              <a:buFont typeface="Calibri"/>
-              <a:buNone/>
             </a:pPr>
             <a:r>
-              <a:rPr sz="1450" b="1">
+              <a:rPr sz="930" b="1">
                 <a:solidFill>
                   <a:srgbClr val="FFFFFF"/>
                 </a:solidFill>
@@ -3259,7 +3165,7 @@
               </a:rPr>
               <a:t>01</a:t>
             </a:r>
-            <a:endParaRPr sz="1400" b="0" i="0" u="none" strike="noStrike" cap="none">
+            <a:endParaRPr sz="898">
               <a:solidFill>
                 <a:schemeClr val="dk1"/>
               </a:solidFill>
@@ -3279,8 +3185,8 @@
         </p:nvSpPr>
         <p:spPr>
           <a:xfrm>
-            <a:off x="1187339" y="4267868"/>
-            <a:ext cx="3754800" cy="502800"/>
+            <a:off x="761816" y="2839397"/>
+            <a:ext cx="2409139" cy="322604"/>
           </a:xfrm>
           <a:prstGeom prst="rect">
             <a:avLst/>
@@ -3291,27 +3197,22 @@
           </a:ln>
         </p:spPr>
         <p:txBody>
-          <a:bodyPr spcFirstLastPara="1" wrap="square" lIns="36576" tIns="36576" rIns="36576" bIns="36576" anchor="ctr" anchorCtr="0">
+          <a:bodyPr spcFirstLastPara="1" wrap="square" lIns="23468" tIns="23468" rIns="23468" bIns="23468" anchor="ctr" anchorCtr="0">
             <a:noAutofit/>
           </a:bodyPr>
           <a:lstStyle/>
           <a:p>
-            <a:pPr marL="0" marR="0" lvl="0" indent="0" algn="l" rtl="0">
-              <a:spcBef>
-                <a:spcPts val="0"/>
-              </a:spcBef>
-              <a:spcAft>
-                <a:spcPts val="200"/>
+            <a:pPr>
+              <a:spcAft>
+                <a:spcPts val="128"/>
               </a:spcAft>
               <a:buClr>
                 <a:srgbClr val="0B1F3A"/>
               </a:buClr>
               <a:buSzPts val="1800"/>
-              <a:buFont typeface="Cambria"/>
-              <a:buNone/>
             </a:pPr>
             <a:r>
-              <a:rPr sz="1800" b="1">
+              <a:rPr sz="1155" b="1">
                 <a:solidFill>
                   <a:srgbClr val="14304B"/>
                 </a:solidFill>
@@ -3319,7 +3220,7 @@
               </a:rPr>
               <a:t>Problem Statement</a:t>
             </a:r>
-            <a:endParaRPr sz="1800" b="0" i="0" u="none" strike="noStrike" cap="none">
+            <a:endParaRPr sz="1155">
               <a:solidFill>
                 <a:schemeClr val="dk1"/>
               </a:solidFill>
@@ -3339,8 +3240,8 @@
         </p:nvSpPr>
         <p:spPr>
           <a:xfrm>
-            <a:off x="556693" y="4935382"/>
-            <a:ext cx="4337100" cy="777300"/>
+            <a:off x="357183" y="3267684"/>
+            <a:ext cx="2782752" cy="498728"/>
           </a:xfrm>
           <a:prstGeom prst="rect">
             <a:avLst/>
@@ -3351,27 +3252,22 @@
           </a:ln>
         </p:spPr>
         <p:txBody>
-          <a:bodyPr spcFirstLastPara="1" wrap="square" lIns="36576" tIns="36576" rIns="36576" bIns="36576" anchor="ctr" anchorCtr="0">
+          <a:bodyPr spcFirstLastPara="1" wrap="square" lIns="23468" tIns="23468" rIns="23468" bIns="23468" anchor="ctr" anchorCtr="0">
             <a:noAutofit/>
           </a:bodyPr>
           <a:lstStyle/>
           <a:p>
-            <a:pPr marL="0" marR="0" lvl="0" indent="0" algn="l" rtl="0">
-              <a:spcBef>
-                <a:spcPts val="0"/>
-              </a:spcBef>
-              <a:spcAft>
-                <a:spcPts val="200"/>
+            <a:pPr>
+              <a:spcAft>
+                <a:spcPts val="128"/>
               </a:spcAft>
               <a:buClr>
                 <a:srgbClr val="4A5568"/>
               </a:buClr>
               <a:buSzPts val="1400"/>
-              <a:buFont typeface="Calibri"/>
-              <a:buNone/>
             </a:pPr>
             <a:r>
-              <a:rPr sz="1200" b="0">
+              <a:rPr sz="770">
                 <a:solidFill>
                   <a:srgbClr val="263441"/>
                 </a:solidFill>
@@ -3379,7 +3275,7 @@
               </a:rPr>
               <a:t>People may not know what PM-JAY covers, whether they are eligible, which hospitals to approach, or what to do next. Language, literacy and weak internet can make access harder.</a:t>
             </a:r>
-            <a:endParaRPr sz="1400" b="0" i="0" u="none" strike="noStrike" cap="none">
+            <a:endParaRPr sz="898">
               <a:solidFill>
                 <a:schemeClr val="dk1"/>
               </a:solidFill>
@@ -3399,8 +3295,8 @@
         </p:nvSpPr>
         <p:spPr>
           <a:xfrm>
-            <a:off x="265625" y="6246775"/>
-            <a:ext cx="4919100" cy="1874400"/>
+            <a:off x="170429" y="4109095"/>
+            <a:ext cx="3156173" cy="1202645"/>
           </a:xfrm>
           <a:prstGeom prst="roundRect">
             <a:avLst>
@@ -3428,21 +3324,12 @@
           </a:effectLst>
         </p:spPr>
         <p:txBody>
-          <a:bodyPr spcFirstLastPara="1" wrap="square" lIns="91425" tIns="91425" rIns="91425" bIns="91425" anchor="ctr" anchorCtr="0">
+          <a:bodyPr spcFirstLastPara="1" wrap="square" lIns="58660" tIns="58660" rIns="58660" bIns="58660" anchor="ctr" anchorCtr="0">
             <a:noAutofit/>
           </a:bodyPr>
           <a:lstStyle/>
           <a:p>
-            <a:pPr marL="0" lvl="0" indent="0" algn="l" rtl="0">
-              <a:spcBef>
-                <a:spcPts val="0"/>
-              </a:spcBef>
-              <a:spcAft>
-                <a:spcPts val="0"/>
-              </a:spcAft>
-              <a:buNone/>
-            </a:pPr>
-            <a:endParaRPr/>
+            <a:endParaRPr sz="583"/>
           </a:p>
         </p:txBody>
       </p:sp>
@@ -3454,8 +3341,8 @@
         </p:nvSpPr>
         <p:spPr>
           <a:xfrm>
-            <a:off x="508181" y="6447943"/>
-            <a:ext cx="533700" cy="502800"/>
+            <a:off x="326057" y="4238168"/>
+            <a:ext cx="342430" cy="322604"/>
           </a:xfrm>
           <a:prstGeom prst="ellipse">
             <a:avLst/>
@@ -3472,21 +3359,12 @@
           </a:ln>
         </p:spPr>
         <p:txBody>
-          <a:bodyPr spcFirstLastPara="1" wrap="square" lIns="91425" tIns="91425" rIns="91425" bIns="91425" anchor="ctr" anchorCtr="0">
+          <a:bodyPr spcFirstLastPara="1" wrap="square" lIns="58660" tIns="58660" rIns="58660" bIns="58660" anchor="ctr" anchorCtr="0">
             <a:noAutofit/>
           </a:bodyPr>
           <a:lstStyle/>
           <a:p>
-            <a:pPr marL="0" lvl="0" indent="0" algn="l" rtl="0">
-              <a:spcBef>
-                <a:spcPts val="0"/>
-              </a:spcBef>
-              <a:spcAft>
-                <a:spcPts val="0"/>
-              </a:spcAft>
-              <a:buNone/>
-            </a:pPr>
-            <a:endParaRPr/>
+            <a:endParaRPr sz="583"/>
           </a:p>
         </p:txBody>
       </p:sp>
@@ -3498,8 +3376,8 @@
         </p:nvSpPr>
         <p:spPr>
           <a:xfrm>
-            <a:off x="508181" y="6447943"/>
-            <a:ext cx="533700" cy="502800"/>
+            <a:off x="326057" y="4238168"/>
+            <a:ext cx="342430" cy="322604"/>
           </a:xfrm>
           <a:prstGeom prst="rect">
             <a:avLst/>
@@ -3515,22 +3393,17 @@
           </a:bodyPr>
           <a:lstStyle/>
           <a:p>
-            <a:pPr marL="0" marR="0" lvl="0" indent="0" algn="ctr" rtl="0">
-              <a:spcBef>
-                <a:spcPts val="0"/>
-              </a:spcBef>
-              <a:spcAft>
-                <a:spcPts val="200"/>
+            <a:pPr algn="ctr">
+              <a:spcAft>
+                <a:spcPts val="128"/>
               </a:spcAft>
               <a:buClr>
                 <a:srgbClr val="FFFFFF"/>
               </a:buClr>
               <a:buSzPts val="1400"/>
-              <a:buFont typeface="Calibri"/>
-              <a:buNone/>
             </a:pPr>
             <a:r>
-              <a:rPr sz="1450" b="1">
+              <a:rPr sz="930" b="1">
                 <a:solidFill>
                   <a:srgbClr val="FFFFFF"/>
                 </a:solidFill>
@@ -3538,7 +3411,7 @@
               </a:rPr>
               <a:t>02</a:t>
             </a:r>
-            <a:endParaRPr sz="1400" b="0" i="0" u="none" strike="noStrike" cap="none">
+            <a:endParaRPr sz="898">
               <a:solidFill>
                 <a:schemeClr val="dk1"/>
               </a:solidFill>
@@ -3558,8 +3431,8 @@
         </p:nvSpPr>
         <p:spPr>
           <a:xfrm>
-            <a:off x="1187339" y="6447943"/>
-            <a:ext cx="3754800" cy="502800"/>
+            <a:off x="761816" y="4238168"/>
+            <a:ext cx="2409139" cy="322604"/>
           </a:xfrm>
           <a:prstGeom prst="rect">
             <a:avLst/>
@@ -3570,27 +3443,22 @@
           </a:ln>
         </p:spPr>
         <p:txBody>
-          <a:bodyPr spcFirstLastPara="1" wrap="square" lIns="36576" tIns="36576" rIns="36576" bIns="36576" anchor="ctr" anchorCtr="0">
+          <a:bodyPr spcFirstLastPara="1" wrap="square" lIns="23468" tIns="23468" rIns="23468" bIns="23468" anchor="ctr" anchorCtr="0">
             <a:noAutofit/>
           </a:bodyPr>
           <a:lstStyle/>
           <a:p>
-            <a:pPr marL="0" marR="0" lvl="0" indent="0" algn="l" rtl="0">
-              <a:spcBef>
-                <a:spcPts val="0"/>
-              </a:spcBef>
-              <a:spcAft>
-                <a:spcPts val="200"/>
+            <a:pPr>
+              <a:spcAft>
+                <a:spcPts val="128"/>
               </a:spcAft>
               <a:buClr>
                 <a:srgbClr val="0B1F3A"/>
               </a:buClr>
               <a:buSzPts val="1800"/>
-              <a:buFont typeface="Cambria"/>
-              <a:buNone/>
             </a:pPr>
             <a:r>
-              <a:rPr sz="1800" b="1">
+              <a:rPr sz="1155" b="1">
                 <a:solidFill>
                   <a:srgbClr val="14304B"/>
                 </a:solidFill>
@@ -3598,7 +3466,7 @@
               </a:rPr>
               <a:t>Objectives</a:t>
             </a:r>
-            <a:endParaRPr sz="1800" b="0" i="0" u="none" strike="noStrike" cap="none">
+            <a:endParaRPr sz="1155">
               <a:solidFill>
                 <a:schemeClr val="dk1"/>
               </a:solidFill>
@@ -3618,8 +3486,8 @@
         </p:nvSpPr>
         <p:spPr>
           <a:xfrm>
-            <a:off x="556693" y="7115456"/>
-            <a:ext cx="4337100" cy="777300"/>
+            <a:off x="357183" y="4666454"/>
+            <a:ext cx="2782752" cy="498728"/>
           </a:xfrm>
           <a:prstGeom prst="rect">
             <a:avLst/>
@@ -3630,17 +3498,14 @@
           </a:ln>
         </p:spPr>
         <p:txBody>
-          <a:bodyPr spcFirstLastPara="1" wrap="square" lIns="36576" tIns="18288" rIns="36576" bIns="18288" anchor="ctr" anchorCtr="0">
+          <a:bodyPr spcFirstLastPara="1" wrap="square" lIns="23468" tIns="11734" rIns="23468" bIns="11734" anchor="ctr" anchorCtr="0">
             <a:noAutofit/>
           </a:bodyPr>
           <a:lstStyle/>
           <a:p>
-            <a:pPr marL="342900" marR="0" lvl="0" indent="-342900" algn="l" rtl="0">
-              <a:spcBef>
-                <a:spcPts val="0"/>
-              </a:spcBef>
-              <a:spcAft>
-                <a:spcPts val="100"/>
+            <a:pPr marL="220005" indent="-220005">
+              <a:spcAft>
+                <a:spcPts val="64"/>
               </a:spcAft>
               <a:buClr>
                 <a:schemeClr val="dk1"/>
@@ -3650,7 +3515,7 @@
               <a:buChar char="•"/>
             </a:pPr>
             <a:r>
-              <a:rPr sz="1120" b="0">
+              <a:rPr sz="719">
                 <a:solidFill>
                   <a:srgbClr val="263441"/>
                 </a:solidFill>
@@ -3658,7 +3523,7 @@
               </a:rPr>
               <a:t>Make PM-JAY guidance clearer; help users find relevant hospitals; explain documents and next steps.</a:t>
             </a:r>
-            <a:endParaRPr sz="1400" b="0" i="0" u="none" strike="noStrike" cap="none">
+            <a:endParaRPr sz="898">
               <a:solidFill>
                 <a:schemeClr val="dk1"/>
               </a:solidFill>
@@ -3678,8 +3543,8 @@
         </p:nvSpPr>
         <p:spPr>
           <a:xfrm>
-            <a:off x="265625" y="8426849"/>
-            <a:ext cx="4919100" cy="1874400"/>
+            <a:off x="170429" y="5507865"/>
+            <a:ext cx="3156173" cy="1202645"/>
           </a:xfrm>
           <a:prstGeom prst="roundRect">
             <a:avLst>
@@ -3707,21 +3572,12 @@
           </a:effectLst>
         </p:spPr>
         <p:txBody>
-          <a:bodyPr spcFirstLastPara="1" wrap="square" lIns="91425" tIns="91425" rIns="91425" bIns="91425" anchor="ctr" anchorCtr="0">
+          <a:bodyPr spcFirstLastPara="1" wrap="square" lIns="58660" tIns="58660" rIns="58660" bIns="58660" anchor="ctr" anchorCtr="0">
             <a:noAutofit/>
           </a:bodyPr>
           <a:lstStyle/>
           <a:p>
-            <a:pPr marL="0" lvl="0" indent="0" algn="l" rtl="0">
-              <a:spcBef>
-                <a:spcPts val="0"/>
-              </a:spcBef>
-              <a:spcAft>
-                <a:spcPts val="0"/>
-              </a:spcAft>
-              <a:buNone/>
-            </a:pPr>
-            <a:endParaRPr/>
+            <a:endParaRPr sz="583"/>
           </a:p>
         </p:txBody>
       </p:sp>
@@ -3733,8 +3589,8 @@
         </p:nvSpPr>
         <p:spPr>
           <a:xfrm>
-            <a:off x="508181" y="8628017"/>
-            <a:ext cx="533700" cy="502800"/>
+            <a:off x="326057" y="5636938"/>
+            <a:ext cx="342430" cy="322604"/>
           </a:xfrm>
           <a:prstGeom prst="ellipse">
             <a:avLst/>
@@ -3751,21 +3607,12 @@
           </a:ln>
         </p:spPr>
         <p:txBody>
-          <a:bodyPr spcFirstLastPara="1" wrap="square" lIns="91425" tIns="91425" rIns="91425" bIns="91425" anchor="ctr" anchorCtr="0">
+          <a:bodyPr spcFirstLastPara="1" wrap="square" lIns="58660" tIns="58660" rIns="58660" bIns="58660" anchor="ctr" anchorCtr="0">
             <a:noAutofit/>
           </a:bodyPr>
           <a:lstStyle/>
           <a:p>
-            <a:pPr marL="0" lvl="0" indent="0" algn="l" rtl="0">
-              <a:spcBef>
-                <a:spcPts val="0"/>
-              </a:spcBef>
-              <a:spcAft>
-                <a:spcPts val="0"/>
-              </a:spcAft>
-              <a:buNone/>
-            </a:pPr>
-            <a:endParaRPr/>
+            <a:endParaRPr sz="583"/>
           </a:p>
         </p:txBody>
       </p:sp>
@@ -3777,8 +3624,8 @@
         </p:nvSpPr>
         <p:spPr>
           <a:xfrm>
-            <a:off x="508181" y="8628017"/>
-            <a:ext cx="533700" cy="502800"/>
+            <a:off x="326057" y="5636938"/>
+            <a:ext cx="342430" cy="322604"/>
           </a:xfrm>
           <a:prstGeom prst="rect">
             <a:avLst/>
@@ -3794,22 +3641,17 @@
           </a:bodyPr>
           <a:lstStyle/>
           <a:p>
-            <a:pPr marL="0" marR="0" lvl="0" indent="0" algn="ctr" rtl="0">
-              <a:spcBef>
-                <a:spcPts val="0"/>
-              </a:spcBef>
-              <a:spcAft>
-                <a:spcPts val="200"/>
+            <a:pPr algn="ctr">
+              <a:spcAft>
+                <a:spcPts val="128"/>
               </a:spcAft>
               <a:buClr>
                 <a:srgbClr val="FFFFFF"/>
               </a:buClr>
               <a:buSzPts val="1400"/>
-              <a:buFont typeface="Calibri"/>
-              <a:buNone/>
             </a:pPr>
             <a:r>
-              <a:rPr sz="1450" b="1">
+              <a:rPr sz="930" b="1">
                 <a:solidFill>
                   <a:srgbClr val="FFFFFF"/>
                 </a:solidFill>
@@ -3817,7 +3659,7 @@
               </a:rPr>
               <a:t>03</a:t>
             </a:r>
-            <a:endParaRPr sz="1400" b="0" i="0" u="none" strike="noStrike" cap="none">
+            <a:endParaRPr sz="898">
               <a:solidFill>
                 <a:schemeClr val="dk1"/>
               </a:solidFill>
@@ -3837,8 +3679,8 @@
         </p:nvSpPr>
         <p:spPr>
           <a:xfrm>
-            <a:off x="1187339" y="8628017"/>
-            <a:ext cx="3754800" cy="502800"/>
+            <a:off x="761816" y="5636938"/>
+            <a:ext cx="2409139" cy="322604"/>
           </a:xfrm>
           <a:prstGeom prst="rect">
             <a:avLst/>
@@ -3849,30 +3691,22 @@
           </a:ln>
         </p:spPr>
         <p:txBody>
-          <a:bodyPr spcFirstLastPara="1" wrap="square" lIns="36576" tIns="36576" rIns="36576" bIns="36576" anchor="ctr" anchorCtr="0">
+          <a:bodyPr spcFirstLastPara="1" wrap="square" lIns="23468" tIns="23468" rIns="23468" bIns="23468" anchor="ctr" anchorCtr="0">
             <a:noAutofit/>
           </a:bodyPr>
           <a:lstStyle/>
           <a:p>
-            <a:pPr marL="0" marR="0" lvl="0" indent="0" algn="l" rtl="0">
-              <a:lnSpc>
-                <a:spcPct val="100000"/>
-              </a:lnSpc>
-              <a:spcBef>
-                <a:spcPts val="0"/>
-              </a:spcBef>
-              <a:spcAft>
-                <a:spcPts val="200"/>
+            <a:pPr>
+              <a:spcAft>
+                <a:spcPts val="128"/>
               </a:spcAft>
               <a:buClr>
                 <a:srgbClr val="0B1F3A"/>
               </a:buClr>
               <a:buSzPts val="1800"/>
-              <a:buFont typeface="Cambria"/>
-              <a:buNone/>
             </a:pPr>
             <a:r>
-              <a:rPr sz="1700" b="1">
+              <a:rPr sz="1091" b="1">
                 <a:solidFill>
                   <a:srgbClr val="14304B"/>
                 </a:solidFill>
@@ -3880,7 +3714,7 @@
               </a:rPr>
               <a:t>Design Thinking Journey</a:t>
             </a:r>
-            <a:endParaRPr sz="1800" b="1" i="0" u="none" strike="noStrike" cap="none">
+            <a:endParaRPr sz="1155" b="1">
               <a:solidFill>
                 <a:schemeClr val="dk1"/>
               </a:solidFill>
@@ -3900,8 +3734,8 @@
         </p:nvSpPr>
         <p:spPr>
           <a:xfrm>
-            <a:off x="556693" y="9295531"/>
-            <a:ext cx="4337100" cy="777300"/>
+            <a:off x="357183" y="6065225"/>
+            <a:ext cx="2782752" cy="498728"/>
           </a:xfrm>
           <a:prstGeom prst="rect">
             <a:avLst/>
@@ -3912,27 +3746,22 @@
           </a:ln>
         </p:spPr>
         <p:txBody>
-          <a:bodyPr spcFirstLastPara="1" wrap="square" lIns="36576" tIns="36576" rIns="36576" bIns="36576" anchor="ctr" anchorCtr="0">
+          <a:bodyPr spcFirstLastPara="1" wrap="square" lIns="23468" tIns="23468" rIns="23468" bIns="23468" anchor="ctr" anchorCtr="0">
             <a:noAutofit/>
           </a:bodyPr>
           <a:lstStyle/>
           <a:p>
-            <a:pPr marL="0" marR="0" lvl="0" indent="0" algn="l" rtl="0">
-              <a:spcBef>
-                <a:spcPts val="0"/>
-              </a:spcBef>
-              <a:spcAft>
-                <a:spcPts val="200"/>
+            <a:pPr>
+              <a:spcAft>
+                <a:spcPts val="128"/>
               </a:spcAft>
               <a:buClr>
                 <a:srgbClr val="4A5568"/>
               </a:buClr>
               <a:buSzPts val="1400"/>
-              <a:buFont typeface="Calibri"/>
-              <a:buNone/>
             </a:pPr>
             <a:r>
-              <a:rPr sz="1019" b="0">
+              <a:rPr sz="654">
                 <a:solidFill>
                   <a:srgbClr val="263441"/>
                 </a:solidFill>
@@ -3940,7 +3769,7 @@
               </a:rPr>
               <a:t>EMPATHISE — Questionnaire with 23 respondents</a:t>
             </a:r>
-            <a:endParaRPr>
+            <a:endParaRPr sz="583">
               <a:latin typeface="Calibri"/>
               <a:ea typeface="Calibri"/>
               <a:cs typeface="Calibri"/>
@@ -3950,11 +3779,11 @@
           <a:p>
             <a:pPr>
               <a:spcAft>
-                <a:spcPts val="200"/>
+                <a:spcPts val="128"/>
               </a:spcAft>
             </a:pPr>
             <a:r>
-              <a:rPr sz="1019" b="0">
+              <a:rPr sz="654">
                 <a:solidFill>
                   <a:srgbClr val="263441"/>
                 </a:solidFill>
@@ -3966,11 +3795,11 @@
           <a:p>
             <a:pPr>
               <a:spcAft>
-                <a:spcPts val="200"/>
+                <a:spcPts val="128"/>
               </a:spcAft>
             </a:pPr>
             <a:r>
-              <a:rPr sz="1019" b="0">
+              <a:rPr sz="654">
                 <a:solidFill>
                   <a:srgbClr val="263441"/>
                 </a:solidFill>
@@ -3982,11 +3811,11 @@
           <a:p>
             <a:pPr>
               <a:spcAft>
-                <a:spcPts val="200"/>
+                <a:spcPts val="128"/>
               </a:spcAft>
             </a:pPr>
             <a:r>
-              <a:rPr sz="1019" b="0">
+              <a:rPr sz="654">
                 <a:solidFill>
                   <a:srgbClr val="263441"/>
                 </a:solidFill>
@@ -4005,8 +3834,8 @@
         </p:nvSpPr>
         <p:spPr>
           <a:xfrm>
-            <a:off x="265450" y="12666550"/>
-            <a:ext cx="4919100" cy="2200500"/>
+            <a:off x="170317" y="8228125"/>
+            <a:ext cx="3156173" cy="1411876"/>
           </a:xfrm>
           <a:prstGeom prst="roundRect">
             <a:avLst>
@@ -4034,21 +3863,12 @@
           </a:effectLst>
         </p:spPr>
         <p:txBody>
-          <a:bodyPr spcFirstLastPara="1" wrap="square" lIns="91425" tIns="91425" rIns="91425" bIns="91425" anchor="ctr" anchorCtr="0">
+          <a:bodyPr spcFirstLastPara="1" wrap="square" lIns="58660" tIns="58660" rIns="58660" bIns="58660" anchor="ctr" anchorCtr="0">
             <a:noAutofit/>
           </a:bodyPr>
           <a:lstStyle/>
           <a:p>
-            <a:pPr marL="0" lvl="0" indent="0" algn="l" rtl="0">
-              <a:spcBef>
-                <a:spcPts val="0"/>
-              </a:spcBef>
-              <a:spcAft>
-                <a:spcPts val="0"/>
-              </a:spcAft>
-              <a:buNone/>
-            </a:pPr>
-            <a:endParaRPr/>
+            <a:endParaRPr sz="583"/>
           </a:p>
         </p:txBody>
       </p:sp>
@@ -4060,8 +3880,8 @@
         </p:nvSpPr>
         <p:spPr>
           <a:xfrm>
-            <a:off x="429942" y="12919826"/>
-            <a:ext cx="533400" cy="502800"/>
+            <a:off x="275857" y="8390631"/>
+            <a:ext cx="342238" cy="322604"/>
           </a:xfrm>
           <a:prstGeom prst="ellipse">
             <a:avLst/>
@@ -4078,21 +3898,12 @@
           </a:ln>
         </p:spPr>
         <p:txBody>
-          <a:bodyPr spcFirstLastPara="1" wrap="square" lIns="91425" tIns="91425" rIns="91425" bIns="91425" anchor="ctr" anchorCtr="0">
+          <a:bodyPr spcFirstLastPara="1" wrap="square" lIns="58660" tIns="58660" rIns="58660" bIns="58660" anchor="ctr" anchorCtr="0">
             <a:noAutofit/>
           </a:bodyPr>
           <a:lstStyle/>
           <a:p>
-            <a:pPr marL="0" lvl="0" indent="0" algn="l" rtl="0">
-              <a:spcBef>
-                <a:spcPts val="0"/>
-              </a:spcBef>
-              <a:spcAft>
-                <a:spcPts val="0"/>
-              </a:spcAft>
-              <a:buNone/>
-            </a:pPr>
-            <a:endParaRPr/>
+            <a:endParaRPr sz="583"/>
           </a:p>
         </p:txBody>
       </p:sp>
@@ -4104,8 +3915,8 @@
         </p:nvSpPr>
         <p:spPr>
           <a:xfrm>
-            <a:off x="429942" y="12919826"/>
-            <a:ext cx="533400" cy="502800"/>
+            <a:off x="275857" y="8390631"/>
+            <a:ext cx="342238" cy="322604"/>
           </a:xfrm>
           <a:prstGeom prst="rect">
             <a:avLst/>
@@ -4121,22 +3932,17 @@
           </a:bodyPr>
           <a:lstStyle/>
           <a:p>
-            <a:pPr marL="0" marR="0" lvl="0" indent="0" algn="ctr" rtl="0">
-              <a:spcBef>
-                <a:spcPts val="0"/>
-              </a:spcBef>
-              <a:spcAft>
-                <a:spcPts val="200"/>
+            <a:pPr algn="ctr">
+              <a:spcAft>
+                <a:spcPts val="128"/>
               </a:spcAft>
               <a:buClr>
                 <a:srgbClr val="FFFFFF"/>
               </a:buClr>
               <a:buSzPts val="1400"/>
-              <a:buFont typeface="Calibri"/>
-              <a:buNone/>
             </a:pPr>
             <a:r>
-              <a:rPr sz="1450" b="1">
+              <a:rPr sz="930" b="1">
                 <a:solidFill>
                   <a:srgbClr val="FFFFFF"/>
                 </a:solidFill>
@@ -4144,7 +3950,7 @@
               </a:rPr>
               <a:t>05</a:t>
             </a:r>
-            <a:endParaRPr sz="1400" b="0" i="0" u="none" strike="noStrike" cap="none">
+            <a:endParaRPr sz="898">
               <a:solidFill>
                 <a:schemeClr val="dk1"/>
               </a:solidFill>
@@ -4164,8 +3970,8 @@
         </p:nvSpPr>
         <p:spPr>
           <a:xfrm>
-            <a:off x="1109123" y="12919826"/>
-            <a:ext cx="3755100" cy="502800"/>
+            <a:off x="711631" y="8390631"/>
+            <a:ext cx="2409332" cy="322604"/>
           </a:xfrm>
           <a:prstGeom prst="rect">
             <a:avLst/>
@@ -4176,27 +3982,22 @@
           </a:ln>
         </p:spPr>
         <p:txBody>
-          <a:bodyPr spcFirstLastPara="1" wrap="square" lIns="36576" tIns="36576" rIns="36576" bIns="36576" anchor="ctr" anchorCtr="0">
+          <a:bodyPr spcFirstLastPara="1" wrap="square" lIns="23468" tIns="23468" rIns="23468" bIns="23468" anchor="ctr" anchorCtr="0">
             <a:noAutofit/>
           </a:bodyPr>
           <a:lstStyle/>
           <a:p>
-            <a:pPr marL="0" marR="0" lvl="0" indent="0" algn="l" rtl="0">
-              <a:spcBef>
-                <a:spcPts val="0"/>
-              </a:spcBef>
-              <a:spcAft>
-                <a:spcPts val="200"/>
+            <a:pPr>
+              <a:spcAft>
+                <a:spcPts val="128"/>
               </a:spcAft>
               <a:buClr>
                 <a:srgbClr val="0B1F3A"/>
               </a:buClr>
               <a:buSzPts val="1800"/>
-              <a:buFont typeface="Cambria"/>
-              <a:buNone/>
             </a:pPr>
             <a:r>
-              <a:rPr sz="1700" b="1">
+              <a:rPr sz="1091" b="1">
                 <a:solidFill>
                   <a:srgbClr val="14304B"/>
                 </a:solidFill>
@@ -4204,7 +4005,7 @@
               </a:rPr>
               <a:t>Ideation &amp; Solution</a:t>
             </a:r>
-            <a:endParaRPr sz="1800" b="0" i="0" u="none" strike="noStrike" cap="none">
+            <a:endParaRPr sz="1155">
               <a:solidFill>
                 <a:schemeClr val="dk1"/>
               </a:solidFill>
@@ -4224,8 +4025,8 @@
         </p:nvSpPr>
         <p:spPr>
           <a:xfrm>
-            <a:off x="5504700" y="4066700"/>
-            <a:ext cx="4919100" cy="4280400"/>
+            <a:off x="3531903" y="2710324"/>
+            <a:ext cx="3156173" cy="2746373"/>
           </a:xfrm>
           <a:prstGeom prst="roundRect">
             <a:avLst>
@@ -4253,21 +4054,12 @@
           </a:effectLst>
         </p:spPr>
         <p:txBody>
-          <a:bodyPr spcFirstLastPara="1" wrap="square" lIns="91425" tIns="91425" rIns="91425" bIns="91425" anchor="ctr" anchorCtr="0">
+          <a:bodyPr spcFirstLastPara="1" wrap="square" lIns="58660" tIns="58660" rIns="58660" bIns="58660" anchor="ctr" anchorCtr="0">
             <a:noAutofit/>
           </a:bodyPr>
           <a:lstStyle/>
           <a:p>
-            <a:pPr marL="0" lvl="0" indent="0" algn="l" rtl="0">
-              <a:spcBef>
-                <a:spcPts val="0"/>
-              </a:spcBef>
-              <a:spcAft>
-                <a:spcPts val="0"/>
-              </a:spcAft>
-              <a:buNone/>
-            </a:pPr>
-            <a:endParaRPr/>
+            <a:endParaRPr sz="583"/>
           </a:p>
         </p:txBody>
       </p:sp>
@@ -4279,8 +4071,8 @@
         </p:nvSpPr>
         <p:spPr>
           <a:xfrm>
-            <a:off x="5733288" y="4267875"/>
-            <a:ext cx="502800" cy="502800"/>
+            <a:off x="3678569" y="2839401"/>
+            <a:ext cx="322604" cy="322604"/>
           </a:xfrm>
           <a:prstGeom prst="ellipse">
             <a:avLst/>
@@ -4297,21 +4089,12 @@
           </a:ln>
         </p:spPr>
         <p:txBody>
-          <a:bodyPr spcFirstLastPara="1" wrap="square" lIns="91425" tIns="91425" rIns="91425" bIns="91425" anchor="ctr" anchorCtr="0">
+          <a:bodyPr spcFirstLastPara="1" wrap="square" lIns="58660" tIns="58660" rIns="58660" bIns="58660" anchor="ctr" anchorCtr="0">
             <a:noAutofit/>
           </a:bodyPr>
           <a:lstStyle/>
           <a:p>
-            <a:pPr marL="0" lvl="0" indent="0" algn="l" rtl="0">
-              <a:spcBef>
-                <a:spcPts val="0"/>
-              </a:spcBef>
-              <a:spcAft>
-                <a:spcPts val="0"/>
-              </a:spcAft>
-              <a:buNone/>
-            </a:pPr>
-            <a:endParaRPr/>
+            <a:endParaRPr sz="583"/>
           </a:p>
         </p:txBody>
       </p:sp>
@@ -4323,8 +4106,8 @@
         </p:nvSpPr>
         <p:spPr>
           <a:xfrm>
-            <a:off x="5733288" y="4267875"/>
-            <a:ext cx="502800" cy="502800"/>
+            <a:off x="3678569" y="2839401"/>
+            <a:ext cx="322604" cy="322604"/>
           </a:xfrm>
           <a:prstGeom prst="rect">
             <a:avLst/>
@@ -4340,22 +4123,17 @@
           </a:bodyPr>
           <a:lstStyle/>
           <a:p>
-            <a:pPr marL="0" marR="0" lvl="0" indent="0" algn="ctr" rtl="0">
-              <a:spcBef>
-                <a:spcPts val="0"/>
-              </a:spcBef>
-              <a:spcAft>
-                <a:spcPts val="200"/>
+            <a:pPr algn="ctr">
+              <a:spcAft>
+                <a:spcPts val="128"/>
               </a:spcAft>
               <a:buClr>
                 <a:srgbClr val="FFFFFF"/>
               </a:buClr>
               <a:buSzPts val="1400"/>
-              <a:buFont typeface="Calibri"/>
-              <a:buNone/>
             </a:pPr>
             <a:r>
-              <a:rPr sz="1450" b="1">
+              <a:rPr sz="930" b="1">
                 <a:solidFill>
                   <a:srgbClr val="FFFFFF"/>
                 </a:solidFill>
@@ -4363,7 +4141,7 @@
               </a:rPr>
               <a:t>06</a:t>
             </a:r>
-            <a:endParaRPr sz="1400" b="0" i="0" u="none" strike="noStrike" cap="none">
+            <a:endParaRPr sz="898">
               <a:solidFill>
                 <a:schemeClr val="dk1"/>
               </a:solidFill>
@@ -4383,8 +4161,8 @@
         </p:nvSpPr>
         <p:spPr>
           <a:xfrm>
-            <a:off x="6373368" y="4267875"/>
-            <a:ext cx="3538800" cy="502800"/>
+            <a:off x="4089254" y="2839401"/>
+            <a:ext cx="2270550" cy="322604"/>
           </a:xfrm>
           <a:prstGeom prst="rect">
             <a:avLst/>
@@ -4400,22 +4178,14 @@
           </a:bodyPr>
           <a:lstStyle/>
           <a:p>
-            <a:pPr marL="0" marR="0" lvl="0" indent="0" algn="l" rtl="0">
-              <a:spcBef>
-                <a:spcPts val="0"/>
-              </a:spcBef>
-              <a:spcAft>
-                <a:spcPts val="0"/>
-              </a:spcAft>
+            <a:pPr>
               <a:buClr>
                 <a:srgbClr val="0B1F3A"/>
               </a:buClr>
               <a:buSzPts val="1800"/>
-              <a:buFont typeface="Cambria"/>
-              <a:buNone/>
             </a:pPr>
             <a:r>
-              <a:rPr lang="en-US" sz="1800" b="1" i="0" u="none" strike="noStrike" cap="none">
+              <a:rPr lang="en-US" sz="1155" b="1">
                 <a:solidFill>
                   <a:srgbClr val="0B1F3A"/>
                 </a:solidFill>
@@ -4426,7 +4196,7 @@
               </a:rPr>
               <a:t>Prototype / Circuit/ Photos</a:t>
             </a:r>
-            <a:endParaRPr sz="1800" b="0" i="0" u="none" strike="noStrike" cap="none">
+            <a:endParaRPr sz="1155">
               <a:solidFill>
                 <a:schemeClr val="dk1"/>
               </a:solidFill>
@@ -4446,8 +4216,8 @@
         </p:nvSpPr>
         <p:spPr>
           <a:xfrm>
-            <a:off x="5733288" y="4935387"/>
-            <a:ext cx="1998000" cy="1691700"/>
+            <a:off x="3678569" y="3267687"/>
+            <a:ext cx="1281949" cy="1085422"/>
           </a:xfrm>
           <a:prstGeom prst="roundRect">
             <a:avLst>
@@ -4478,26 +4248,21 @@
           </a:ln>
         </p:spPr>
         <p:txBody>
-          <a:bodyPr spcFirstLastPara="1" wrap="square" lIns="27432" tIns="27432" rIns="27432" bIns="27432" anchor="ctr" anchorCtr="0">
+          <a:bodyPr spcFirstLastPara="1" wrap="square" lIns="17601" tIns="17601" rIns="17601" bIns="17601" anchor="ctr" anchorCtr="0">
             <a:noAutofit/>
           </a:bodyPr>
           <a:lstStyle/>
           <a:p>
-            <a:pPr marL="0" marR="0" lvl="0" indent="0" algn="ctr" rtl="0">
-              <a:spcBef>
-                <a:spcPts val="0"/>
-              </a:spcBef>
-              <a:spcAft>
-                <a:spcPts val="200"/>
+            <a:pPr algn="ctr">
+              <a:spcAft>
+                <a:spcPts val="128"/>
               </a:spcAft>
               <a:buClr>
                 <a:srgbClr val="4A5568"/>
               </a:buClr>
               <a:buSzPts val="1200"/>
-              <a:buFont typeface="Calibri"/>
-              <a:buNone/>
             </a:pPr>
-            <a:endParaRPr sz="1200" b="0" i="0" u="none" strike="noStrike" cap="none">
+            <a:endParaRPr sz="770">
               <a:solidFill>
                 <a:schemeClr val="dk1"/>
               </a:solidFill>
@@ -4517,8 +4282,8 @@
         </p:nvSpPr>
         <p:spPr>
           <a:xfrm>
-            <a:off x="7914132" y="4935387"/>
-            <a:ext cx="1998000" cy="1691700"/>
+            <a:off x="5077833" y="3267687"/>
+            <a:ext cx="1281949" cy="1085422"/>
           </a:xfrm>
           <a:prstGeom prst="roundRect">
             <a:avLst>
@@ -4549,26 +4314,21 @@
           </a:ln>
         </p:spPr>
         <p:txBody>
-          <a:bodyPr spcFirstLastPara="1" wrap="square" lIns="27432" tIns="27432" rIns="27432" bIns="27432" anchor="ctr" anchorCtr="0">
+          <a:bodyPr spcFirstLastPara="1" wrap="square" lIns="17601" tIns="17601" rIns="17601" bIns="17601" anchor="ctr" anchorCtr="0">
             <a:noAutofit/>
           </a:bodyPr>
           <a:lstStyle/>
           <a:p>
-            <a:pPr marL="0" marR="0" lvl="0" indent="0" algn="ctr" rtl="0">
-              <a:spcBef>
-                <a:spcPts val="0"/>
-              </a:spcBef>
-              <a:spcAft>
-                <a:spcPts val="200"/>
+            <a:pPr algn="ctr">
+              <a:spcAft>
+                <a:spcPts val="128"/>
               </a:spcAft>
               <a:buClr>
                 <a:srgbClr val="4A5568"/>
               </a:buClr>
               <a:buSzPts val="1200"/>
-              <a:buFont typeface="Calibri"/>
-              <a:buNone/>
             </a:pPr>
-            <a:endParaRPr sz="1200" b="0" i="0" u="none" strike="noStrike" cap="none">
+            <a:endParaRPr sz="770">
               <a:solidFill>
                 <a:schemeClr val="dk1"/>
               </a:solidFill>
@@ -4588,8 +4348,8 @@
         </p:nvSpPr>
         <p:spPr>
           <a:xfrm>
-            <a:off x="5504701" y="8644575"/>
-            <a:ext cx="4919100" cy="1874400"/>
+            <a:off x="3531904" y="5647561"/>
+            <a:ext cx="3156173" cy="1202645"/>
           </a:xfrm>
           <a:prstGeom prst="roundRect">
             <a:avLst>
@@ -4617,21 +4377,12 @@
           </a:effectLst>
         </p:spPr>
         <p:txBody>
-          <a:bodyPr spcFirstLastPara="1" wrap="square" lIns="91425" tIns="91425" rIns="91425" bIns="91425" anchor="ctr" anchorCtr="0">
+          <a:bodyPr spcFirstLastPara="1" wrap="square" lIns="58660" tIns="58660" rIns="58660" bIns="58660" anchor="ctr" anchorCtr="0">
             <a:noAutofit/>
           </a:bodyPr>
           <a:lstStyle/>
           <a:p>
-            <a:pPr marL="0" lvl="0" indent="0" algn="l" rtl="0">
-              <a:spcBef>
-                <a:spcPts val="0"/>
-              </a:spcBef>
-              <a:spcAft>
-                <a:spcPts val="0"/>
-              </a:spcAft>
-              <a:buNone/>
-            </a:pPr>
-            <a:endParaRPr/>
+            <a:endParaRPr sz="583"/>
           </a:p>
         </p:txBody>
       </p:sp>
@@ -4643,8 +4394,8 @@
         </p:nvSpPr>
         <p:spPr>
           <a:xfrm>
-            <a:off x="5747266" y="8759115"/>
-            <a:ext cx="533400" cy="502800"/>
+            <a:off x="3687537" y="5721052"/>
+            <a:ext cx="342238" cy="322604"/>
           </a:xfrm>
           <a:prstGeom prst="ellipse">
             <a:avLst/>
@@ -4661,21 +4412,12 @@
           </a:ln>
         </p:spPr>
         <p:txBody>
-          <a:bodyPr spcFirstLastPara="1" wrap="square" lIns="91425" tIns="91425" rIns="91425" bIns="91425" anchor="ctr" anchorCtr="0">
+          <a:bodyPr spcFirstLastPara="1" wrap="square" lIns="58660" tIns="58660" rIns="58660" bIns="58660" anchor="ctr" anchorCtr="0">
             <a:noAutofit/>
           </a:bodyPr>
           <a:lstStyle/>
           <a:p>
-            <a:pPr marL="0" lvl="0" indent="0" algn="l" rtl="0">
-              <a:spcBef>
-                <a:spcPts val="0"/>
-              </a:spcBef>
-              <a:spcAft>
-                <a:spcPts val="0"/>
-              </a:spcAft>
-              <a:buNone/>
-            </a:pPr>
-            <a:endParaRPr/>
+            <a:endParaRPr sz="583"/>
           </a:p>
         </p:txBody>
       </p:sp>
@@ -4687,8 +4429,8 @@
         </p:nvSpPr>
         <p:spPr>
           <a:xfrm>
-            <a:off x="5747266" y="8759115"/>
-            <a:ext cx="533400" cy="502800"/>
+            <a:off x="3687537" y="5721052"/>
+            <a:ext cx="342238" cy="322604"/>
           </a:xfrm>
           <a:prstGeom prst="rect">
             <a:avLst/>
@@ -4704,22 +4446,17 @@
           </a:bodyPr>
           <a:lstStyle/>
           <a:p>
-            <a:pPr marL="0" marR="0" lvl="0" indent="0" algn="ctr" rtl="0">
-              <a:spcBef>
-                <a:spcPts val="0"/>
-              </a:spcBef>
-              <a:spcAft>
-                <a:spcPts val="200"/>
+            <a:pPr algn="ctr">
+              <a:spcAft>
+                <a:spcPts val="128"/>
               </a:spcAft>
               <a:buClr>
                 <a:srgbClr val="FFFFFF"/>
               </a:buClr>
               <a:buSzPts val="1400"/>
-              <a:buFont typeface="Calibri"/>
-              <a:buNone/>
             </a:pPr>
             <a:r>
-              <a:rPr sz="1450" b="1">
+              <a:rPr sz="930" b="1">
                 <a:solidFill>
                   <a:srgbClr val="FFFFFF"/>
                 </a:solidFill>
@@ -4727,7 +4464,7 @@
               </a:rPr>
               <a:t>07</a:t>
             </a:r>
-            <a:endParaRPr sz="1400" b="0" i="0" u="none" strike="noStrike" cap="none">
+            <a:endParaRPr sz="898">
               <a:solidFill>
                 <a:schemeClr val="dk1"/>
               </a:solidFill>
@@ -4747,8 +4484,8 @@
         </p:nvSpPr>
         <p:spPr>
           <a:xfrm>
-            <a:off x="6426455" y="8759106"/>
-            <a:ext cx="3900600" cy="563100"/>
+            <a:off x="4123316" y="5721046"/>
+            <a:ext cx="2502687" cy="361294"/>
           </a:xfrm>
           <a:prstGeom prst="rect">
             <a:avLst/>
@@ -4759,27 +4496,22 @@
           </a:ln>
         </p:spPr>
         <p:txBody>
-          <a:bodyPr spcFirstLastPara="1" wrap="square" lIns="36576" tIns="36576" rIns="36576" bIns="36576" anchor="ctr" anchorCtr="0">
+          <a:bodyPr spcFirstLastPara="1" wrap="square" lIns="23468" tIns="23468" rIns="23468" bIns="23468" anchor="ctr" anchorCtr="0">
             <a:noAutofit/>
           </a:bodyPr>
           <a:lstStyle/>
           <a:p>
-            <a:pPr marL="0" marR="0" lvl="0" indent="0" algn="l" rtl="0">
-              <a:spcBef>
-                <a:spcPts val="0"/>
-              </a:spcBef>
-              <a:spcAft>
-                <a:spcPts val="200"/>
+            <a:pPr>
+              <a:spcAft>
+                <a:spcPts val="128"/>
               </a:spcAft>
               <a:buClr>
                 <a:srgbClr val="0B1F3A"/>
               </a:buClr>
               <a:buSzPts val="1800"/>
-              <a:buFont typeface="Cambria"/>
-              <a:buNone/>
             </a:pPr>
             <a:r>
-              <a:rPr sz="1500" b="1">
+              <a:rPr sz="962" b="1">
                 <a:solidFill>
                   <a:srgbClr val="14304B"/>
                 </a:solidFill>
@@ -4787,7 +4519,7 @@
               </a:rPr>
               <a:t>Results, Observations &amp; Failure Log</a:t>
             </a:r>
-            <a:endParaRPr sz="1800" b="0" i="0" u="none" strike="noStrike" cap="none">
+            <a:endParaRPr sz="1155">
               <a:solidFill>
                 <a:schemeClr val="dk1"/>
               </a:solidFill>
@@ -4807,8 +4539,8 @@
         </p:nvSpPr>
         <p:spPr>
           <a:xfrm>
-            <a:off x="5795778" y="9395700"/>
-            <a:ext cx="4337100" cy="539496"/>
+            <a:off x="3718663" y="6129495"/>
+            <a:ext cx="2782752" cy="346149"/>
           </a:xfrm>
           <a:prstGeom prst="rect">
             <a:avLst/>
@@ -4819,27 +4551,22 @@
           </a:ln>
         </p:spPr>
         <p:txBody>
-          <a:bodyPr spcFirstLastPara="1" wrap="square" lIns="36576" tIns="18288" rIns="36576" bIns="18288" anchor="ctr" anchorCtr="0">
+          <a:bodyPr spcFirstLastPara="1" wrap="square" lIns="23468" tIns="11734" rIns="23468" bIns="11734" anchor="ctr" anchorCtr="0">
             <a:noAutofit/>
           </a:bodyPr>
           <a:lstStyle/>
           <a:p>
-            <a:pPr marL="0" marR="0" lvl="0" indent="0" algn="l" rtl="0">
-              <a:spcBef>
-                <a:spcPts val="0"/>
-              </a:spcBef>
-              <a:spcAft>
-                <a:spcPts val="100"/>
+            <a:pPr>
+              <a:spcAft>
+                <a:spcPts val="64"/>
               </a:spcAft>
               <a:buClr>
                 <a:srgbClr val="4A5568"/>
               </a:buClr>
               <a:buSzPts val="1400"/>
-              <a:buFont typeface="Calibri"/>
-              <a:buNone/>
             </a:pPr>
             <a:r>
-              <a:rPr sz="919" b="0">
+              <a:rPr sz="590">
                 <a:solidFill>
                   <a:srgbClr val="263441"/>
                 </a:solidFill>
@@ -4847,7 +4574,7 @@
               </a:rPr>
               <a:t>Survey of 23 respondents: 65% did not know eligibility; 70% did not know benefits.</a:t>
             </a:r>
-            <a:endParaRPr sz="1400" b="0" i="0" u="none" strike="noStrike" cap="none">
+            <a:endParaRPr sz="898">
               <a:latin typeface="Calibri"/>
               <a:ea typeface="Calibri"/>
               <a:cs typeface="Calibri"/>
@@ -4857,11 +4584,11 @@
           <a:p>
             <a:pPr>
               <a:spcAft>
-                <a:spcPts val="100"/>
+                <a:spcPts val="64"/>
               </a:spcAft>
             </a:pPr>
             <a:r>
-              <a:rPr sz="919" b="0">
+              <a:rPr sz="590">
                 <a:solidFill>
                   <a:srgbClr val="263441"/>
                 </a:solidFill>
@@ -4873,11 +4600,11 @@
           <a:p>
             <a:pPr>
               <a:spcAft>
-                <a:spcPts val="100"/>
+                <a:spcPts val="64"/>
               </a:spcAft>
             </a:pPr>
             <a:r>
-              <a:rPr sz="919" b="0">
+              <a:rPr sz="590">
                 <a:solidFill>
                   <a:srgbClr val="263441"/>
                 </a:solidFill>
@@ -4896,8 +4623,8 @@
         </p:nvSpPr>
         <p:spPr>
           <a:xfrm>
-            <a:off x="5504701" y="10793413"/>
-            <a:ext cx="4919100" cy="1874400"/>
+            <a:off x="3531904" y="7026290"/>
+            <a:ext cx="3156173" cy="1202645"/>
           </a:xfrm>
           <a:prstGeom prst="roundRect">
             <a:avLst>
@@ -4925,21 +4652,12 @@
           </a:effectLst>
         </p:spPr>
         <p:txBody>
-          <a:bodyPr spcFirstLastPara="1" wrap="square" lIns="91425" tIns="91425" rIns="91425" bIns="91425" anchor="ctr" anchorCtr="0">
+          <a:bodyPr spcFirstLastPara="1" wrap="square" lIns="58660" tIns="58660" rIns="58660" bIns="58660" anchor="ctr" anchorCtr="0">
             <a:noAutofit/>
           </a:bodyPr>
           <a:lstStyle/>
           <a:p>
-            <a:pPr marL="0" lvl="0" indent="0" algn="l" rtl="0">
-              <a:spcBef>
-                <a:spcPts val="0"/>
-              </a:spcBef>
-              <a:spcAft>
-                <a:spcPts val="0"/>
-              </a:spcAft>
-              <a:buNone/>
-            </a:pPr>
-            <a:endParaRPr/>
+            <a:endParaRPr sz="583"/>
           </a:p>
         </p:txBody>
       </p:sp>
@@ -4951,8 +4669,8 @@
         </p:nvSpPr>
         <p:spPr>
           <a:xfrm>
-            <a:off x="5747260" y="10975331"/>
-            <a:ext cx="533700" cy="502800"/>
+            <a:off x="3687534" y="7143012"/>
+            <a:ext cx="342430" cy="322604"/>
           </a:xfrm>
           <a:prstGeom prst="ellipse">
             <a:avLst/>
@@ -4969,21 +4687,12 @@
           </a:ln>
         </p:spPr>
         <p:txBody>
-          <a:bodyPr spcFirstLastPara="1" wrap="square" lIns="91425" tIns="91425" rIns="91425" bIns="91425" anchor="ctr" anchorCtr="0">
+          <a:bodyPr spcFirstLastPara="1" wrap="square" lIns="58660" tIns="58660" rIns="58660" bIns="58660" anchor="ctr" anchorCtr="0">
             <a:noAutofit/>
           </a:bodyPr>
           <a:lstStyle/>
           <a:p>
-            <a:pPr marL="0" lvl="0" indent="0" algn="l" rtl="0">
-              <a:spcBef>
-                <a:spcPts val="0"/>
-              </a:spcBef>
-              <a:spcAft>
-                <a:spcPts val="0"/>
-              </a:spcAft>
-              <a:buNone/>
-            </a:pPr>
-            <a:endParaRPr/>
+            <a:endParaRPr sz="583"/>
           </a:p>
         </p:txBody>
       </p:sp>
@@ -4995,8 +4704,8 @@
         </p:nvSpPr>
         <p:spPr>
           <a:xfrm>
-            <a:off x="5747260" y="10975331"/>
-            <a:ext cx="533700" cy="502800"/>
+            <a:off x="3687534" y="7143012"/>
+            <a:ext cx="342430" cy="322604"/>
           </a:xfrm>
           <a:prstGeom prst="rect">
             <a:avLst/>
@@ -5012,22 +4721,17 @@
           </a:bodyPr>
           <a:lstStyle/>
           <a:p>
-            <a:pPr marL="0" marR="0" lvl="0" indent="0" algn="ctr" rtl="0">
-              <a:spcBef>
-                <a:spcPts val="0"/>
-              </a:spcBef>
-              <a:spcAft>
-                <a:spcPts val="200"/>
+            <a:pPr algn="ctr">
+              <a:spcAft>
+                <a:spcPts val="128"/>
               </a:spcAft>
               <a:buClr>
                 <a:srgbClr val="FFFFFF"/>
               </a:buClr>
               <a:buSzPts val="1400"/>
-              <a:buFont typeface="Calibri"/>
-              <a:buNone/>
             </a:pPr>
             <a:r>
-              <a:rPr sz="1450" b="1">
+              <a:rPr sz="930" b="1">
                 <a:solidFill>
                   <a:srgbClr val="FFFFFF"/>
                 </a:solidFill>
@@ -5035,7 +4739,7 @@
               </a:rPr>
               <a:t>08</a:t>
             </a:r>
-            <a:endParaRPr sz="1400" b="0" i="0" u="none" strike="noStrike" cap="none">
+            <a:endParaRPr sz="898">
               <a:solidFill>
                 <a:schemeClr val="dk1"/>
               </a:solidFill>
@@ -5055,8 +4759,8 @@
         </p:nvSpPr>
         <p:spPr>
           <a:xfrm>
-            <a:off x="6426426" y="10975331"/>
-            <a:ext cx="3754800" cy="502800"/>
+            <a:off x="4123297" y="7143012"/>
+            <a:ext cx="2409139" cy="322604"/>
           </a:xfrm>
           <a:prstGeom prst="rect">
             <a:avLst/>
@@ -5067,27 +4771,22 @@
           </a:ln>
         </p:spPr>
         <p:txBody>
-          <a:bodyPr spcFirstLastPara="1" wrap="square" lIns="36576" tIns="36576" rIns="36576" bIns="36576" anchor="ctr" anchorCtr="0">
+          <a:bodyPr spcFirstLastPara="1" wrap="square" lIns="23468" tIns="23468" rIns="23468" bIns="23468" anchor="ctr" anchorCtr="0">
             <a:noAutofit/>
           </a:bodyPr>
           <a:lstStyle/>
           <a:p>
-            <a:pPr marL="0" marR="0" lvl="0" indent="0" algn="l" rtl="0">
-              <a:spcBef>
-                <a:spcPts val="0"/>
-              </a:spcBef>
-              <a:spcAft>
-                <a:spcPts val="200"/>
+            <a:pPr>
+              <a:spcAft>
+                <a:spcPts val="128"/>
               </a:spcAft>
               <a:buClr>
                 <a:srgbClr val="0B1F3A"/>
               </a:buClr>
               <a:buSzPts val="1800"/>
-              <a:buFont typeface="Cambria"/>
-              <a:buNone/>
             </a:pPr>
             <a:r>
-              <a:rPr sz="1700" b="1">
+              <a:rPr sz="1091" b="1">
                 <a:solidFill>
                   <a:srgbClr val="14304B"/>
                 </a:solidFill>
@@ -5095,7 +4794,7 @@
               </a:rPr>
               <a:t>Impact</a:t>
             </a:r>
-            <a:endParaRPr sz="1800" b="0" i="0" u="none" strike="noStrike" cap="none">
+            <a:endParaRPr sz="1155">
               <a:solidFill>
                 <a:schemeClr val="dk1"/>
               </a:solidFill>
@@ -5115,8 +4814,8 @@
         </p:nvSpPr>
         <p:spPr>
           <a:xfrm>
-            <a:off x="5795772" y="11642845"/>
-            <a:ext cx="4337100" cy="777300"/>
+            <a:off x="3718660" y="7571299"/>
+            <a:ext cx="2782752" cy="498728"/>
           </a:xfrm>
           <a:prstGeom prst="rect">
             <a:avLst/>
@@ -5127,27 +4826,22 @@
           </a:ln>
         </p:spPr>
         <p:txBody>
-          <a:bodyPr spcFirstLastPara="1" wrap="square" lIns="36576" tIns="36576" rIns="36576" bIns="36576" anchor="ctr" anchorCtr="0">
+          <a:bodyPr spcFirstLastPara="1" wrap="square" lIns="23468" tIns="23468" rIns="23468" bIns="23468" anchor="ctr" anchorCtr="0">
             <a:noAutofit/>
           </a:bodyPr>
           <a:lstStyle/>
           <a:p>
-            <a:pPr marL="0" marR="0" lvl="0" indent="0" algn="l" rtl="0">
-              <a:spcBef>
-                <a:spcPts val="0"/>
-              </a:spcBef>
-              <a:spcAft>
-                <a:spcPts val="200"/>
+            <a:pPr>
+              <a:spcAft>
+                <a:spcPts val="128"/>
               </a:spcAft>
               <a:buClr>
                 <a:srgbClr val="4A5568"/>
               </a:buClr>
               <a:buSzPts val="1400"/>
-              <a:buFont typeface="Calibri"/>
-              <a:buNone/>
             </a:pPr>
             <a:r>
-              <a:rPr sz="1019" b="0">
+              <a:rPr sz="654">
                 <a:solidFill>
                   <a:srgbClr val="263441"/>
                 </a:solidFill>
@@ -5155,7 +4849,7 @@
               </a:rPr>
               <a:t>SDG 3: supports navigation to healthcare information.</a:t>
             </a:r>
-            <a:endParaRPr sz="1400" b="0" i="0" u="none" strike="noStrike" cap="none">
+            <a:endParaRPr sz="898">
               <a:latin typeface="Calibri"/>
               <a:ea typeface="Calibri"/>
               <a:cs typeface="Calibri"/>
@@ -5165,11 +4859,11 @@
           <a:p>
             <a:pPr>
               <a:spcAft>
-                <a:spcPts val="200"/>
+                <a:spcPts val="128"/>
               </a:spcAft>
             </a:pPr>
             <a:r>
-              <a:rPr sz="1019" b="0">
+              <a:rPr sz="654">
                 <a:solidFill>
                   <a:srgbClr val="263441"/>
                 </a:solidFill>
@@ -5181,11 +4875,11 @@
           <a:p>
             <a:pPr>
               <a:spcAft>
-                <a:spcPts val="200"/>
+                <a:spcPts val="128"/>
               </a:spcAft>
             </a:pPr>
             <a:r>
-              <a:rPr sz="1019" b="0">
+              <a:rPr sz="654">
                 <a:solidFill>
                   <a:srgbClr val="263441"/>
                 </a:solidFill>
@@ -5197,11 +4891,11 @@
           <a:p>
             <a:pPr>
               <a:spcAft>
-                <a:spcPts val="200"/>
+                <a:spcPts val="128"/>
               </a:spcAft>
             </a:pPr>
             <a:r>
-              <a:rPr sz="1019" b="0">
+              <a:rPr sz="654">
                 <a:solidFill>
                   <a:srgbClr val="263441"/>
                 </a:solidFill>
@@ -5220,8 +4914,8 @@
         </p:nvSpPr>
         <p:spPr>
           <a:xfrm>
-            <a:off x="5504700" y="12911025"/>
-            <a:ext cx="4919100" cy="1956000"/>
+            <a:off x="3531903" y="8384984"/>
+            <a:ext cx="3156173" cy="1255001"/>
           </a:xfrm>
           <a:prstGeom prst="roundRect">
             <a:avLst>
@@ -5249,21 +4943,12 @@
           </a:effectLst>
         </p:spPr>
         <p:txBody>
-          <a:bodyPr spcFirstLastPara="1" wrap="square" lIns="91425" tIns="91425" rIns="91425" bIns="91425" anchor="ctr" anchorCtr="0">
+          <a:bodyPr spcFirstLastPara="1" wrap="square" lIns="58660" tIns="58660" rIns="58660" bIns="58660" anchor="ctr" anchorCtr="0">
             <a:noAutofit/>
           </a:bodyPr>
           <a:lstStyle/>
           <a:p>
-            <a:pPr marL="0" lvl="0" indent="0" algn="l" rtl="0">
-              <a:spcBef>
-                <a:spcPts val="0"/>
-              </a:spcBef>
-              <a:spcAft>
-                <a:spcPts val="0"/>
-              </a:spcAft>
-              <a:buNone/>
-            </a:pPr>
-            <a:endParaRPr/>
+            <a:endParaRPr sz="583"/>
           </a:p>
         </p:txBody>
       </p:sp>
@@ -5275,8 +4960,8 @@
         </p:nvSpPr>
         <p:spPr>
           <a:xfrm>
-            <a:off x="5747266" y="13112193"/>
-            <a:ext cx="533400" cy="502800"/>
+            <a:off x="3687537" y="8514057"/>
+            <a:ext cx="342238" cy="322604"/>
           </a:xfrm>
           <a:prstGeom prst="ellipse">
             <a:avLst/>
@@ -5293,21 +4978,12 @@
           </a:ln>
         </p:spPr>
         <p:txBody>
-          <a:bodyPr spcFirstLastPara="1" wrap="square" lIns="91425" tIns="91425" rIns="91425" bIns="91425" anchor="ctr" anchorCtr="0">
+          <a:bodyPr spcFirstLastPara="1" wrap="square" lIns="58660" tIns="58660" rIns="58660" bIns="58660" anchor="ctr" anchorCtr="0">
             <a:noAutofit/>
           </a:bodyPr>
           <a:lstStyle/>
           <a:p>
-            <a:pPr marL="0" lvl="0" indent="0" algn="l" rtl="0">
-              <a:spcBef>
-                <a:spcPts val="0"/>
-              </a:spcBef>
-              <a:spcAft>
-                <a:spcPts val="0"/>
-              </a:spcAft>
-              <a:buNone/>
-            </a:pPr>
-            <a:endParaRPr/>
+            <a:endParaRPr sz="583"/>
           </a:p>
         </p:txBody>
       </p:sp>
@@ -5319,8 +4995,8 @@
         </p:nvSpPr>
         <p:spPr>
           <a:xfrm>
-            <a:off x="5747266" y="13112193"/>
-            <a:ext cx="533400" cy="502800"/>
+            <a:off x="3687537" y="8514057"/>
+            <a:ext cx="342238" cy="322604"/>
           </a:xfrm>
           <a:prstGeom prst="rect">
             <a:avLst/>
@@ -5336,22 +5012,17 @@
           </a:bodyPr>
           <a:lstStyle/>
           <a:p>
-            <a:pPr marL="0" marR="0" lvl="0" indent="0" algn="ctr" rtl="0">
-              <a:spcBef>
-                <a:spcPts val="0"/>
-              </a:spcBef>
-              <a:spcAft>
-                <a:spcPts val="200"/>
+            <a:pPr algn="ctr">
+              <a:spcAft>
+                <a:spcPts val="128"/>
               </a:spcAft>
               <a:buClr>
                 <a:srgbClr val="FFFFFF"/>
               </a:buClr>
               <a:buSzPts val="1400"/>
-              <a:buFont typeface="Calibri"/>
-              <a:buNone/>
             </a:pPr>
             <a:r>
-              <a:rPr sz="1450" b="1">
+              <a:rPr sz="930" b="1">
                 <a:solidFill>
                   <a:srgbClr val="FFFFFF"/>
                 </a:solidFill>
@@ -5359,7 +5030,7 @@
               </a:rPr>
               <a:t>09</a:t>
             </a:r>
-            <a:endParaRPr sz="1400" b="0" i="0" u="none" strike="noStrike" cap="none">
+            <a:endParaRPr sz="898">
               <a:solidFill>
                 <a:schemeClr val="dk1"/>
               </a:solidFill>
@@ -5379,8 +5050,8 @@
         </p:nvSpPr>
         <p:spPr>
           <a:xfrm>
-            <a:off x="6426447" y="13112193"/>
-            <a:ext cx="3755100" cy="502800"/>
+            <a:off x="4123311" y="8514057"/>
+            <a:ext cx="2409332" cy="322604"/>
           </a:xfrm>
           <a:prstGeom prst="rect">
             <a:avLst/>
@@ -5391,27 +5062,22 @@
           </a:ln>
         </p:spPr>
         <p:txBody>
-          <a:bodyPr spcFirstLastPara="1" wrap="square" lIns="36576" tIns="36576" rIns="36576" bIns="36576" anchor="ctr" anchorCtr="0">
+          <a:bodyPr spcFirstLastPara="1" wrap="square" lIns="23468" tIns="23468" rIns="23468" bIns="23468" anchor="ctr" anchorCtr="0">
             <a:noAutofit/>
           </a:bodyPr>
           <a:lstStyle/>
           <a:p>
-            <a:pPr marL="0" marR="0" lvl="0" indent="0" algn="l" rtl="0">
-              <a:spcBef>
-                <a:spcPts val="0"/>
-              </a:spcBef>
-              <a:spcAft>
-                <a:spcPts val="200"/>
+            <a:pPr>
+              <a:spcAft>
+                <a:spcPts val="128"/>
               </a:spcAft>
               <a:buClr>
                 <a:srgbClr val="0B1F3A"/>
               </a:buClr>
               <a:buSzPts val="1800"/>
-              <a:buFont typeface="Cambria"/>
-              <a:buNone/>
             </a:pPr>
             <a:r>
-              <a:rPr sz="1550" b="1">
+              <a:rPr sz="994" b="1">
                 <a:solidFill>
                   <a:srgbClr val="14304B"/>
                 </a:solidFill>
@@ -5419,7 +5085,7 @@
               </a:rPr>
               <a:t>Conclusion &amp; Future Scope</a:t>
             </a:r>
-            <a:endParaRPr sz="1800" b="0" i="0" u="none" strike="noStrike" cap="none">
+            <a:endParaRPr sz="1155">
               <a:solidFill>
                 <a:schemeClr val="dk1"/>
               </a:solidFill>
@@ -5439,8 +5105,8 @@
         </p:nvSpPr>
         <p:spPr>
           <a:xfrm>
-            <a:off x="5795779" y="13779705"/>
-            <a:ext cx="4337100" cy="777300"/>
+            <a:off x="3718664" y="8942343"/>
+            <a:ext cx="2782752" cy="498728"/>
           </a:xfrm>
           <a:prstGeom prst="rect">
             <a:avLst/>
@@ -5451,22 +5117,18 @@
           </a:ln>
         </p:spPr>
         <p:txBody>
-          <a:bodyPr spcFirstLastPara="1" wrap="square" lIns="36576" tIns="36576" rIns="36576" bIns="36576" anchor="ctr" anchorCtr="0">
+          <a:bodyPr spcFirstLastPara="1" wrap="square" lIns="23468" tIns="23468" rIns="23468" bIns="23468" anchor="ctr" anchorCtr="0">
             <a:noAutofit/>
           </a:bodyPr>
           <a:lstStyle/>
           <a:p>
-            <a:pPr marL="0" marR="0" lvl="0" indent="0" algn="l" rtl="0">
-              <a:spcBef>
-                <a:spcPts val="0"/>
-              </a:spcBef>
-              <a:spcAft>
-                <a:spcPts val="200"/>
-              </a:spcAft>
-              <a:buNone/>
+            <a:pPr>
+              <a:spcAft>
+                <a:spcPts val="128"/>
+              </a:spcAft>
             </a:pPr>
             <a:r>
-              <a:rPr sz="1010" b="0">
+              <a:rPr sz="648">
                 <a:solidFill>
                   <a:srgbClr val="263441"/>
                 </a:solidFill>
@@ -5474,7 +5136,7 @@
               </a:rPr>
               <a:t>PM-JAY Claim GPS turns a healthcare question into a guided next step. Next: test with users, verify hospital records, improve language/accessibility features, and explore authorised integrations.</a:t>
             </a:r>
-            <a:endParaRPr sz="1400" b="0" i="0" u="none" strike="noStrike" cap="none">
+            <a:endParaRPr sz="898">
               <a:latin typeface="Calibri"/>
               <a:ea typeface="Calibri"/>
               <a:cs typeface="Calibri"/>
@@ -5491,8 +5153,8 @@
         </p:nvSpPr>
         <p:spPr>
           <a:xfrm>
-            <a:off x="3049724" y="14841149"/>
-            <a:ext cx="4796100" cy="365700"/>
+            <a:off x="1956751" y="9623382"/>
+            <a:ext cx="3077254" cy="234639"/>
           </a:xfrm>
           <a:prstGeom prst="rect">
             <a:avLst/>
@@ -5503,27 +5165,22 @@
           </a:ln>
         </p:spPr>
         <p:txBody>
-          <a:bodyPr spcFirstLastPara="1" wrap="square" lIns="36576" tIns="36576" rIns="36576" bIns="36576" anchor="ctr" anchorCtr="0">
+          <a:bodyPr spcFirstLastPara="1" wrap="square" lIns="23468" tIns="23468" rIns="23468" bIns="23468" anchor="ctr" anchorCtr="0">
             <a:noAutofit/>
           </a:bodyPr>
           <a:lstStyle/>
           <a:p>
-            <a:pPr marL="0" marR="0" lvl="0" indent="0" algn="ctr" rtl="0">
-              <a:spcBef>
-                <a:spcPts val="0"/>
-              </a:spcBef>
-              <a:spcAft>
-                <a:spcPts val="200"/>
+            <a:pPr algn="ctr">
+              <a:spcAft>
+                <a:spcPts val="128"/>
               </a:spcAft>
               <a:buClr>
                 <a:srgbClr val="FFFFFF"/>
               </a:buClr>
               <a:buSzPts val="1300"/>
-              <a:buFont typeface="Calibri"/>
-              <a:buNone/>
             </a:pPr>
             <a:r>
-              <a:rPr sz="1050" b="1">
+              <a:rPr sz="674" b="1">
                 <a:solidFill>
                   <a:srgbClr val="FFFFFF"/>
                 </a:solidFill>
@@ -5531,7 +5188,7 @@
               </a:rPr>
               <a:t>Guide: Rohini Patil</a:t>
             </a:r>
-            <a:endParaRPr sz="1300" b="0" i="0" u="none" strike="noStrike" cap="none">
+            <a:endParaRPr sz="834">
               <a:solidFill>
                 <a:schemeClr val="dk1"/>
               </a:solidFill>
@@ -5559,8 +5216,8 @@
         </p:blipFill>
         <p:spPr>
           <a:xfrm>
-            <a:off x="2326164" y="67825"/>
-            <a:ext cx="5800725" cy="819150"/>
+            <a:off x="1492504" y="144582"/>
+            <a:ext cx="3721838" cy="525580"/>
           </a:xfrm>
           <a:prstGeom prst="rect">
             <a:avLst/>
@@ -5587,8 +5244,8 @@
         </p:nvSpPr>
         <p:spPr>
           <a:xfrm>
-            <a:off x="277492" y="10546708"/>
-            <a:ext cx="4919100" cy="1874400"/>
+            <a:off x="178043" y="6868000"/>
+            <a:ext cx="3156173" cy="1202645"/>
           </a:xfrm>
           <a:prstGeom prst="roundRect">
             <a:avLst>
@@ -5616,21 +5273,12 @@
           </a:effectLst>
         </p:spPr>
         <p:txBody>
-          <a:bodyPr spcFirstLastPara="1" wrap="square" lIns="91425" tIns="91425" rIns="91425" bIns="91425" anchor="ctr" anchorCtr="0">
+          <a:bodyPr spcFirstLastPara="1" wrap="square" lIns="58660" tIns="58660" rIns="58660" bIns="58660" anchor="ctr" anchorCtr="0">
             <a:noAutofit/>
           </a:bodyPr>
           <a:lstStyle/>
           <a:p>
-            <a:pPr marL="0" lvl="0" indent="0" algn="l" rtl="0">
-              <a:spcBef>
-                <a:spcPts val="0"/>
-              </a:spcBef>
-              <a:spcAft>
-                <a:spcPts val="0"/>
-              </a:spcAft>
-              <a:buNone/>
-            </a:pPr>
-            <a:endParaRPr/>
+            <a:endParaRPr sz="583"/>
           </a:p>
         </p:txBody>
       </p:sp>
@@ -5642,8 +5290,8 @@
         </p:nvSpPr>
         <p:spPr>
           <a:xfrm>
-            <a:off x="520048" y="10699752"/>
-            <a:ext cx="533700" cy="502800"/>
+            <a:off x="333671" y="6966196"/>
+            <a:ext cx="342430" cy="322604"/>
           </a:xfrm>
           <a:prstGeom prst="ellipse">
             <a:avLst/>
@@ -5660,21 +5308,12 @@
           </a:ln>
         </p:spPr>
         <p:txBody>
-          <a:bodyPr spcFirstLastPara="1" wrap="square" lIns="91425" tIns="91425" rIns="91425" bIns="91425" anchor="ctr" anchorCtr="0">
+          <a:bodyPr spcFirstLastPara="1" wrap="square" lIns="58660" tIns="58660" rIns="58660" bIns="58660" anchor="ctr" anchorCtr="0">
             <a:noAutofit/>
           </a:bodyPr>
           <a:lstStyle/>
           <a:p>
-            <a:pPr marL="0" lvl="0" indent="0" algn="l" rtl="0">
-              <a:spcBef>
-                <a:spcPts val="0"/>
-              </a:spcBef>
-              <a:spcAft>
-                <a:spcPts val="0"/>
-              </a:spcAft>
-              <a:buNone/>
-            </a:pPr>
-            <a:endParaRPr/>
+            <a:endParaRPr sz="583"/>
           </a:p>
         </p:txBody>
       </p:sp>
@@ -5686,8 +5325,8 @@
         </p:nvSpPr>
         <p:spPr>
           <a:xfrm>
-            <a:off x="520048" y="10699752"/>
-            <a:ext cx="533700" cy="502800"/>
+            <a:off x="333671" y="6966196"/>
+            <a:ext cx="342430" cy="322604"/>
           </a:xfrm>
           <a:prstGeom prst="rect">
             <a:avLst/>
@@ -5703,22 +5342,17 @@
           </a:bodyPr>
           <a:lstStyle/>
           <a:p>
-            <a:pPr marL="0" marR="0" lvl="0" indent="0" algn="ctr" rtl="0">
-              <a:spcBef>
-                <a:spcPts val="0"/>
-              </a:spcBef>
-              <a:spcAft>
-                <a:spcPts val="200"/>
+            <a:pPr algn="ctr">
+              <a:spcAft>
+                <a:spcPts val="128"/>
               </a:spcAft>
               <a:buClr>
                 <a:srgbClr val="FFFFFF"/>
               </a:buClr>
               <a:buSzPts val="1400"/>
-              <a:buFont typeface="Calibri"/>
-              <a:buNone/>
             </a:pPr>
             <a:r>
-              <a:rPr sz="1450" b="1">
+              <a:rPr sz="930" b="1">
                 <a:solidFill>
                   <a:srgbClr val="FFFFFF"/>
                 </a:solidFill>
@@ -5726,7 +5360,7 @@
               </a:rPr>
               <a:t>04</a:t>
             </a:r>
-            <a:endParaRPr sz="1400" b="0" i="0" u="none" strike="noStrike" cap="none">
+            <a:endParaRPr sz="898">
               <a:solidFill>
                 <a:schemeClr val="dk1"/>
               </a:solidFill>
@@ -5746,8 +5380,8 @@
         </p:nvSpPr>
         <p:spPr>
           <a:xfrm>
-            <a:off x="1199206" y="10699752"/>
-            <a:ext cx="3754800" cy="502800"/>
+            <a:off x="769430" y="6966196"/>
+            <a:ext cx="2409139" cy="322604"/>
           </a:xfrm>
           <a:prstGeom prst="rect">
             <a:avLst/>
@@ -5758,25 +5392,18 @@
           </a:ln>
         </p:spPr>
         <p:txBody>
-          <a:bodyPr spcFirstLastPara="1" wrap="square" lIns="36576" tIns="36576" rIns="36576" bIns="36576" anchor="ctr" anchorCtr="0">
+          <a:bodyPr spcFirstLastPara="1" wrap="square" lIns="23468" tIns="23468" rIns="23468" bIns="23468" anchor="ctr" anchorCtr="0">
             <a:noAutofit/>
           </a:bodyPr>
           <a:lstStyle/>
           <a:p>
-            <a:pPr marL="0" marR="0" lvl="0" indent="0" algn="l" rtl="0">
-              <a:lnSpc>
-                <a:spcPct val="100000"/>
-              </a:lnSpc>
-              <a:spcBef>
-                <a:spcPts val="0"/>
-              </a:spcBef>
-              <a:spcAft>
-                <a:spcPts val="200"/>
-              </a:spcAft>
-              <a:buNone/>
+            <a:pPr>
+              <a:spcAft>
+                <a:spcPts val="128"/>
+              </a:spcAft>
             </a:pPr>
             <a:r>
-              <a:rPr sz="1700" b="1">
+              <a:rPr sz="1091" b="1">
                 <a:solidFill>
                   <a:srgbClr val="14304B"/>
                 </a:solidFill>
@@ -5784,7 +5411,7 @@
               </a:rPr>
               <a:t>Research Evidence</a:t>
             </a:r>
-            <a:endParaRPr sz="1800" b="1" i="0" u="none" strike="noStrike" cap="none">
+            <a:endParaRPr sz="1155" b="1">
               <a:solidFill>
                 <a:schemeClr val="dk1"/>
               </a:solidFill>
@@ -5804,8 +5431,8 @@
         </p:nvSpPr>
         <p:spPr>
           <a:xfrm>
-            <a:off x="568560" y="11367265"/>
-            <a:ext cx="4337100" cy="777300"/>
+            <a:off x="364797" y="7394483"/>
+            <a:ext cx="2782752" cy="498728"/>
           </a:xfrm>
           <a:prstGeom prst="rect">
             <a:avLst/>
@@ -5816,22 +5443,18 @@
           </a:ln>
         </p:spPr>
         <p:txBody>
-          <a:bodyPr spcFirstLastPara="1" wrap="square" lIns="36576" tIns="36576" rIns="36576" bIns="36576" anchor="ctr" anchorCtr="0">
+          <a:bodyPr spcFirstLastPara="1" wrap="square" lIns="23468" tIns="23468" rIns="23468" bIns="23468" anchor="ctr" anchorCtr="0">
             <a:noAutofit/>
           </a:bodyPr>
           <a:lstStyle/>
           <a:p>
-            <a:pPr marL="0" lvl="0" indent="0" algn="l" rtl="0">
-              <a:spcBef>
-                <a:spcPts val="0"/>
-              </a:spcBef>
-              <a:spcAft>
-                <a:spcPts val="200"/>
-              </a:spcAft>
-              <a:buNone/>
+            <a:pPr>
+              <a:spcAft>
+                <a:spcPts val="128"/>
+              </a:spcAft>
             </a:pPr>
             <a:r>
-              <a:rPr sz="1010" b="0">
+              <a:rPr sz="648">
                 <a:solidFill>
                   <a:srgbClr val="263441"/>
                 </a:solidFill>
@@ -5839,7 +5462,7 @@
               </a:rPr>
               <a:t>Primary research: questionnaire (n=23).</a:t>
             </a:r>
-            <a:endParaRPr>
+            <a:endParaRPr sz="583">
               <a:latin typeface="Calibri"/>
               <a:ea typeface="Calibri"/>
               <a:cs typeface="Calibri"/>
@@ -5849,11 +5472,11 @@
           <a:p>
             <a:pPr>
               <a:spcAft>
-                <a:spcPts val="200"/>
+                <a:spcPts val="128"/>
               </a:spcAft>
             </a:pPr>
             <a:r>
-              <a:rPr sz="1010" b="0">
+              <a:rPr sz="648">
                 <a:solidFill>
                   <a:srgbClr val="263441"/>
                 </a:solidFill>
@@ -5865,11 +5488,11 @@
           <a:p>
             <a:pPr>
               <a:spcAft>
-                <a:spcPts val="200"/>
+                <a:spcPts val="128"/>
               </a:spcAft>
             </a:pPr>
             <a:r>
-              <a:rPr sz="1010" b="0">
+              <a:rPr sz="648">
                 <a:solidFill>
                   <a:srgbClr val="263441"/>
                 </a:solidFill>
@@ -5881,11 +5504,11 @@
           <a:p>
             <a:pPr>
               <a:spcAft>
-                <a:spcPts val="200"/>
+                <a:spcPts val="128"/>
               </a:spcAft>
             </a:pPr>
             <a:r>
-              <a:rPr sz="1010" b="0">
+              <a:rPr sz="648">
                 <a:solidFill>
                   <a:srgbClr val="263441"/>
                 </a:solidFill>
@@ -5904,8 +5527,8 @@
         </p:nvSpPr>
         <p:spPr>
           <a:xfrm>
-            <a:off x="411485" y="13514832"/>
-            <a:ext cx="4337100" cy="475488"/>
+            <a:off x="264015" y="8772396"/>
+            <a:ext cx="2782752" cy="305081"/>
           </a:xfrm>
           <a:prstGeom prst="rect">
             <a:avLst/>
@@ -5916,22 +5539,18 @@
           </a:ln>
         </p:spPr>
         <p:txBody>
-          <a:bodyPr spcFirstLastPara="1" wrap="square" lIns="36576" tIns="36576" rIns="36576" bIns="36576" anchor="ctr" anchorCtr="0">
+          <a:bodyPr spcFirstLastPara="1" wrap="square" lIns="23468" tIns="23468" rIns="23468" bIns="23468" anchor="ctr" anchorCtr="0">
             <a:noAutofit/>
           </a:bodyPr>
           <a:lstStyle/>
           <a:p>
-            <a:pPr marL="0" lvl="0" indent="0" algn="l" rtl="0">
-              <a:spcBef>
-                <a:spcPts val="0"/>
-              </a:spcBef>
-              <a:spcAft>
-                <a:spcPts val="200"/>
-              </a:spcAft>
-              <a:buNone/>
+            <a:pPr>
+              <a:spcAft>
+                <a:spcPts val="128"/>
+              </a:spcAft>
             </a:pPr>
             <a:r>
-              <a:rPr sz="1050" b="0">
+              <a:rPr sz="674">
                 <a:solidFill>
                   <a:srgbClr val="263441"/>
                 </a:solidFill>
@@ -5939,7 +5558,7 @@
               </a:rPr>
               <a:t>Need-first workflow: user need → guidance → hospital information → documents → assistance.</a:t>
             </a:r>
-            <a:endParaRPr>
+            <a:endParaRPr sz="583">
               <a:latin typeface="Calibri"/>
               <a:ea typeface="Calibri"/>
               <a:cs typeface="Calibri"/>
@@ -5956,8 +5575,8 @@
         </p:nvSpPr>
         <p:spPr>
           <a:xfrm>
-            <a:off x="411480" y="2459736"/>
-            <a:ext cx="1828800" cy="50292"/>
+            <a:off x="264012" y="1679270"/>
+            <a:ext cx="1173387" cy="32268"/>
           </a:xfrm>
           <a:prstGeom prst="rect">
             <a:avLst/>
@@ -5988,7 +5607,7 @@
           <a:lstStyle/>
           <a:p>
             <a:pPr algn="ctr"/>
-            <a:endParaRPr/>
+            <a:endParaRPr sz="583"/>
           </a:p>
         </p:txBody>
       </p:sp>
@@ -6000,8 +5619,8 @@
         </p:nvSpPr>
         <p:spPr>
           <a:xfrm>
-            <a:off x="5870448" y="9962628"/>
-            <a:ext cx="4343400" cy="118872"/>
+            <a:off x="3766573" y="6483035"/>
+            <a:ext cx="2786795" cy="96690"/>
           </a:xfrm>
           <a:prstGeom prst="rect">
             <a:avLst/>
@@ -6009,18 +5628,18 @@
           <a:noFill/>
         </p:spPr>
         <p:txBody>
-          <a:bodyPr wrap="square" lIns="22860" tIns="22860" rIns="22860" bIns="22860" anchor="ctr">
+          <a:bodyPr wrap="square" lIns="14667" tIns="14667" rIns="14667" bIns="14667" anchor="ctr">
             <a:spAutoFit/>
           </a:bodyPr>
           <a:lstStyle/>
           <a:p>
-            <a:pPr algn="l">
-              <a:spcAft>
-                <a:spcPts val="200"/>
+            <a:pPr>
+              <a:spcAft>
+                <a:spcPts val="128"/>
               </a:spcAft>
             </a:pPr>
             <a:r>
-              <a:rPr sz="680" b="1">
+              <a:rPr sz="436" b="1">
                 <a:solidFill>
                   <a:srgbClr val="226699"/>
                 </a:solidFill>
@@ -6039,8 +5658,8 @@
         </p:nvSpPr>
         <p:spPr>
           <a:xfrm>
-            <a:off x="5870448" y="10090644"/>
-            <a:ext cx="1143000" cy="91440"/>
+            <a:off x="3766573" y="6562753"/>
+            <a:ext cx="733367" cy="83931"/>
           </a:xfrm>
           <a:prstGeom prst="rect">
             <a:avLst/>
@@ -6048,18 +5667,18 @@
           <a:noFill/>
         </p:spPr>
         <p:txBody>
-          <a:bodyPr wrap="square" lIns="22860" tIns="22860" rIns="22860" bIns="22860" anchor="ctr">
+          <a:bodyPr wrap="square" lIns="14667" tIns="14667" rIns="14667" bIns="14667" anchor="ctr">
             <a:spAutoFit/>
           </a:bodyPr>
           <a:lstStyle/>
           <a:p>
-            <a:pPr algn="l">
-              <a:spcAft>
-                <a:spcPts val="200"/>
+            <a:pPr>
+              <a:spcAft>
+                <a:spcPts val="128"/>
               </a:spcAft>
             </a:pPr>
             <a:r>
-              <a:rPr sz="550" b="0">
+              <a:rPr sz="353">
                 <a:solidFill>
                   <a:srgbClr val="556573"/>
                 </a:solidFill>
@@ -6078,8 +5697,8 @@
         </p:nvSpPr>
         <p:spPr>
           <a:xfrm>
-            <a:off x="7059168" y="10104360"/>
-            <a:ext cx="2286000" cy="50292"/>
+            <a:off x="4529274" y="6584183"/>
+            <a:ext cx="1466734" cy="32268"/>
           </a:xfrm>
           <a:prstGeom prst="roundRect">
             <a:avLst/>
@@ -6110,7 +5729,7 @@
           <a:lstStyle/>
           <a:p>
             <a:pPr algn="ctr"/>
-            <a:endParaRPr/>
+            <a:endParaRPr sz="583"/>
           </a:p>
         </p:txBody>
       </p:sp>
@@ -6122,8 +5741,8 @@
         </p:nvSpPr>
         <p:spPr>
           <a:xfrm>
-            <a:off x="7059168" y="10104360"/>
-            <a:ext cx="1485900" cy="50292"/>
+            <a:off x="4529274" y="6584183"/>
+            <a:ext cx="953377" cy="32268"/>
           </a:xfrm>
           <a:prstGeom prst="roundRect">
             <a:avLst/>
@@ -6154,7 +5773,7 @@
           <a:lstStyle/>
           <a:p>
             <a:pPr algn="ctr"/>
-            <a:endParaRPr/>
+            <a:endParaRPr sz="583"/>
           </a:p>
         </p:txBody>
       </p:sp>
@@ -6166,8 +5785,8 @@
         </p:nvSpPr>
         <p:spPr>
           <a:xfrm>
-            <a:off x="9418320" y="10081500"/>
-            <a:ext cx="502920" cy="100584"/>
+            <a:off x="6042944" y="6558344"/>
+            <a:ext cx="322681" cy="86880"/>
           </a:xfrm>
           <a:prstGeom prst="rect">
             <a:avLst/>
@@ -6175,18 +5794,18 @@
           <a:noFill/>
         </p:spPr>
         <p:txBody>
-          <a:bodyPr wrap="square" lIns="22860" tIns="22860" rIns="22860" bIns="22860" anchor="ctr">
+          <a:bodyPr wrap="square" lIns="14667" tIns="14667" rIns="14667" bIns="14667" anchor="ctr">
             <a:spAutoFit/>
           </a:bodyPr>
           <a:lstStyle/>
           <a:p>
             <a:pPr algn="r">
               <a:spcAft>
-                <a:spcPts val="200"/>
+                <a:spcPts val="128"/>
               </a:spcAft>
             </a:pPr>
             <a:r>
-              <a:rPr sz="580" b="1">
+              <a:rPr sz="372" b="1">
                 <a:solidFill>
                   <a:srgbClr val="14304B"/>
                 </a:solidFill>
@@ -6205,8 +5824,8 @@
         </p:nvSpPr>
         <p:spPr>
           <a:xfrm>
-            <a:off x="5870448" y="10182084"/>
-            <a:ext cx="1143000" cy="91440"/>
+            <a:off x="3766573" y="6621422"/>
+            <a:ext cx="733367" cy="83931"/>
           </a:xfrm>
           <a:prstGeom prst="rect">
             <a:avLst/>
@@ -6214,18 +5833,18 @@
           <a:noFill/>
         </p:spPr>
         <p:txBody>
-          <a:bodyPr wrap="square" lIns="22860" tIns="22860" rIns="22860" bIns="22860" anchor="ctr">
+          <a:bodyPr wrap="square" lIns="14667" tIns="14667" rIns="14667" bIns="14667" anchor="ctr">
             <a:spAutoFit/>
           </a:bodyPr>
           <a:lstStyle/>
           <a:p>
-            <a:pPr algn="l">
-              <a:spcAft>
-                <a:spcPts val="200"/>
+            <a:pPr>
+              <a:spcAft>
+                <a:spcPts val="128"/>
               </a:spcAft>
             </a:pPr>
             <a:r>
-              <a:rPr sz="550" b="0">
+              <a:rPr sz="353">
                 <a:solidFill>
                   <a:srgbClr val="556573"/>
                 </a:solidFill>
@@ -6244,8 +5863,8 @@
         </p:nvSpPr>
         <p:spPr>
           <a:xfrm>
-            <a:off x="7059168" y="10195800"/>
-            <a:ext cx="2286000" cy="50292"/>
+            <a:off x="4529274" y="6642852"/>
+            <a:ext cx="1466734" cy="32268"/>
           </a:xfrm>
           <a:prstGeom prst="roundRect">
             <a:avLst/>
@@ -6276,7 +5895,7 @@
           <a:lstStyle/>
           <a:p>
             <a:pPr algn="ctr"/>
-            <a:endParaRPr/>
+            <a:endParaRPr sz="583"/>
           </a:p>
         </p:txBody>
       </p:sp>
@@ -6288,8 +5907,8 @@
         </p:nvSpPr>
         <p:spPr>
           <a:xfrm>
-            <a:off x="7059168" y="10195800"/>
-            <a:ext cx="1600200" cy="50292"/>
+            <a:off x="4529274" y="6642852"/>
+            <a:ext cx="1026714" cy="32268"/>
           </a:xfrm>
           <a:prstGeom prst="roundRect">
             <a:avLst/>
@@ -6320,7 +5939,7 @@
           <a:lstStyle/>
           <a:p>
             <a:pPr algn="ctr"/>
-            <a:endParaRPr/>
+            <a:endParaRPr sz="583"/>
           </a:p>
         </p:txBody>
       </p:sp>
@@ -6332,8 +5951,8 @@
         </p:nvSpPr>
         <p:spPr>
           <a:xfrm>
-            <a:off x="9418320" y="10172939"/>
-            <a:ext cx="502920" cy="100584"/>
+            <a:off x="6042944" y="6617012"/>
+            <a:ext cx="322681" cy="86880"/>
           </a:xfrm>
           <a:prstGeom prst="rect">
             <a:avLst/>
@@ -6341,18 +5960,18 @@
           <a:noFill/>
         </p:spPr>
         <p:txBody>
-          <a:bodyPr wrap="square" lIns="22860" tIns="22860" rIns="22860" bIns="22860" anchor="ctr">
+          <a:bodyPr wrap="square" lIns="14667" tIns="14667" rIns="14667" bIns="14667" anchor="ctr">
             <a:spAutoFit/>
           </a:bodyPr>
           <a:lstStyle/>
           <a:p>
             <a:pPr algn="r">
               <a:spcAft>
-                <a:spcPts val="200"/>
+                <a:spcPts val="128"/>
               </a:spcAft>
             </a:pPr>
             <a:r>
-              <a:rPr sz="580" b="1">
+              <a:rPr sz="372" b="1">
                 <a:solidFill>
                   <a:srgbClr val="14304B"/>
                 </a:solidFill>
@@ -6371,8 +5990,8 @@
         </p:nvSpPr>
         <p:spPr>
           <a:xfrm>
-            <a:off x="5870448" y="10273524"/>
-            <a:ext cx="1143000" cy="91440"/>
+            <a:off x="3766573" y="6680091"/>
+            <a:ext cx="733367" cy="83931"/>
           </a:xfrm>
           <a:prstGeom prst="rect">
             <a:avLst/>
@@ -6380,18 +5999,18 @@
           <a:noFill/>
         </p:spPr>
         <p:txBody>
-          <a:bodyPr wrap="square" lIns="22860" tIns="22860" rIns="22860" bIns="22860" anchor="ctr">
+          <a:bodyPr wrap="square" lIns="14667" tIns="14667" rIns="14667" bIns="14667" anchor="ctr">
             <a:spAutoFit/>
           </a:bodyPr>
           <a:lstStyle/>
           <a:p>
-            <a:pPr algn="l">
-              <a:spcAft>
-                <a:spcPts val="200"/>
+            <a:pPr>
+              <a:spcAft>
+                <a:spcPts val="128"/>
               </a:spcAft>
             </a:pPr>
             <a:r>
-              <a:rPr sz="550" b="0">
+              <a:rPr sz="353">
                 <a:solidFill>
                   <a:srgbClr val="556573"/>
                 </a:solidFill>
@@ -6410,8 +6029,8 @@
         </p:nvSpPr>
         <p:spPr>
           <a:xfrm>
-            <a:off x="7059168" y="10287239"/>
-            <a:ext cx="2286000" cy="50292"/>
+            <a:off x="4529274" y="6701521"/>
+            <a:ext cx="1466734" cy="32268"/>
           </a:xfrm>
           <a:prstGeom prst="roundRect">
             <a:avLst/>
@@ -6442,7 +6061,7 @@
           <a:lstStyle/>
           <a:p>
             <a:pPr algn="ctr"/>
-            <a:endParaRPr/>
+            <a:endParaRPr sz="583"/>
           </a:p>
         </p:txBody>
       </p:sp>
@@ -6454,8 +6073,8 @@
         </p:nvSpPr>
         <p:spPr>
           <a:xfrm>
-            <a:off x="7059168" y="10287239"/>
-            <a:ext cx="1691640" cy="50292"/>
+            <a:off x="4529275" y="6701521"/>
+            <a:ext cx="1085383" cy="32268"/>
           </a:xfrm>
           <a:prstGeom prst="roundRect">
             <a:avLst/>
@@ -6486,7 +6105,7 @@
           <a:lstStyle/>
           <a:p>
             <a:pPr algn="ctr"/>
-            <a:endParaRPr/>
+            <a:endParaRPr sz="583"/>
           </a:p>
         </p:txBody>
       </p:sp>
@@ -6498,8 +6117,8 @@
         </p:nvSpPr>
         <p:spPr>
           <a:xfrm>
-            <a:off x="9418320" y="10264379"/>
-            <a:ext cx="502920" cy="100584"/>
+            <a:off x="6042944" y="6675682"/>
+            <a:ext cx="322681" cy="86880"/>
           </a:xfrm>
           <a:prstGeom prst="rect">
             <a:avLst/>
@@ -6507,18 +6126,18 @@
           <a:noFill/>
         </p:spPr>
         <p:txBody>
-          <a:bodyPr wrap="square" lIns="22860" tIns="22860" rIns="22860" bIns="22860" anchor="ctr">
+          <a:bodyPr wrap="square" lIns="14667" tIns="14667" rIns="14667" bIns="14667" anchor="ctr">
             <a:spAutoFit/>
           </a:bodyPr>
           <a:lstStyle/>
           <a:p>
             <a:pPr algn="r">
               <a:spcAft>
-                <a:spcPts val="200"/>
+                <a:spcPts val="128"/>
               </a:spcAft>
             </a:pPr>
             <a:r>
-              <a:rPr sz="580" b="1">
+              <a:rPr sz="372" b="1">
                 <a:solidFill>
                   <a:srgbClr val="14304B"/>
                 </a:solidFill>
